--- a/day2-deck/decks/Who's Moving Now - Review.pptx
+++ b/day2-deck/decks/Who's Moving Now - Review.pptx
@@ -33317,8 +33317,8 @@
         </p:nvSpPr>
         <p:spPr>
           <a:xfrm>
-            <a:off x="457200" y="5961888"/>
-            <a:ext cx="11274552" cy="548640"/>
+            <a:off x="457200" y="6126480"/>
+            <a:ext cx="11274552" cy="371856"/>
           </a:xfrm>
           <a:prstGeom prst="rect">
             <a:avLst/>
@@ -33337,8 +33337,8 @@
         </p:nvSpPr>
         <p:spPr>
           <a:xfrm>
-            <a:off x="658368" y="5980176"/>
-            <a:ext cx="10927080" cy="512064"/>
+            <a:off x="658368" y="6144768"/>
+            <a:ext cx="10927080" cy="335280"/>
           </a:xfrm>
           <a:prstGeom prst="rect">
             <a:avLst/>
@@ -33362,7 +33362,7 @@
                 <a:ea typeface="Inter" pitchFamily="34" charset="-122"/>
                 <a:cs typeface="Inter" pitchFamily="34" charset="-120"/>
               </a:rPr>
-              <a:t>MAZDA went $155K to $209K, stepping up in August. Ask what changed that month.</a:t>
+              <a:t>Mazda went $155K to $209K, stepping up in August. Ask what changed that month.</a:t>
             </a:r>
             <a:endParaRPr lang="en-US" sz="1600" dirty="0"/>
           </a:p>
@@ -35931,8 +35931,8 @@
         </p:nvSpPr>
         <p:spPr>
           <a:xfrm>
-            <a:off x="457200" y="5961888"/>
-            <a:ext cx="11274552" cy="548640"/>
+            <a:off x="457200" y="6126480"/>
+            <a:ext cx="11274552" cy="371856"/>
           </a:xfrm>
           <a:prstGeom prst="rect">
             <a:avLst/>
@@ -35951,8 +35951,8 @@
         </p:nvSpPr>
         <p:spPr>
           <a:xfrm>
-            <a:off x="658368" y="5980176"/>
-            <a:ext cx="10927080" cy="512064"/>
+            <a:off x="658368" y="6144768"/>
+            <a:ext cx="10927080" cy="335280"/>
           </a:xfrm>
           <a:prstGeom prst="rect">
             <a:avLst/>
@@ -35976,7 +35976,7 @@
                 <a:ea typeface="Inter" pitchFamily="34" charset="-122"/>
                 <a:cs typeface="Inter" pitchFamily="34" charset="-120"/>
               </a:rPr>
-              <a:t>MAZDA went 2.5% to 10.7%, stepping up in August. Ask what changed that month.</a:t>
+              <a:t>Mazda went 2.5% to 10.7%, stepping up in August. Ask what changed that month.</a:t>
             </a:r>
             <a:endParaRPr lang="en-US" sz="1600" dirty="0"/>
           </a:p>
@@ -38545,8 +38545,8 @@
         </p:nvSpPr>
         <p:spPr>
           <a:xfrm>
-            <a:off x="457200" y="5961888"/>
-            <a:ext cx="11274552" cy="548640"/>
+            <a:off x="457200" y="6126480"/>
+            <a:ext cx="11274552" cy="371856"/>
           </a:xfrm>
           <a:prstGeom prst="rect">
             <a:avLst/>
@@ -38565,8 +38565,8 @@
         </p:nvSpPr>
         <p:spPr>
           <a:xfrm>
-            <a:off x="658368" y="5980176"/>
-            <a:ext cx="10927080" cy="512064"/>
+            <a:off x="658368" y="6144768"/>
+            <a:ext cx="10927080" cy="335280"/>
           </a:xfrm>
           <a:prstGeom prst="rect">
             <a:avLst/>
@@ -38590,7 +38590,7 @@
                 <a:ea typeface="Inter" pitchFamily="34" charset="-122"/>
                 <a:cs typeface="Inter" pitchFamily="34" charset="-120"/>
               </a:rPr>
-              <a:t>LEXUS went 425 to 570, stepping up in April. Ask what changed that month.</a:t>
+              <a:t>Lexus went 425 to 570, stepping up in April. Ask what changed that month.</a:t>
             </a:r>
             <a:endParaRPr lang="en-US" sz="1600" dirty="0"/>
           </a:p>
@@ -41159,8 +41159,8 @@
         </p:nvSpPr>
         <p:spPr>
           <a:xfrm>
-            <a:off x="457200" y="5961888"/>
-            <a:ext cx="11274552" cy="548640"/>
+            <a:off x="457200" y="6126480"/>
+            <a:ext cx="11274552" cy="371856"/>
           </a:xfrm>
           <a:prstGeom prst="rect">
             <a:avLst/>
@@ -41179,8 +41179,8 @@
         </p:nvSpPr>
         <p:spPr>
           <a:xfrm>
-            <a:off x="658368" y="5980176"/>
-            <a:ext cx="10927080" cy="512064"/>
+            <a:off x="658368" y="6144768"/>
+            <a:ext cx="10927080" cy="335280"/>
           </a:xfrm>
           <a:prstGeom prst="rect">
             <a:avLst/>
@@ -41204,7 +41204,7 @@
                 <a:ea typeface="Inter" pitchFamily="34" charset="-122"/>
                 <a:cs typeface="Inter" pitchFamily="34" charset="-120"/>
               </a:rPr>
-              <a:t>MAZDA went 1.35 to 1.65, stepping up in August. Ask what changed that month.</a:t>
+              <a:t>Mazda went 1.35 to 1.65, stepping up in August. Ask what changed that month.</a:t>
             </a:r>
             <a:endParaRPr lang="en-US" sz="1600" dirty="0"/>
           </a:p>
@@ -43773,8 +43773,8 @@
         </p:nvSpPr>
         <p:spPr>
           <a:xfrm>
-            <a:off x="457200" y="5961888"/>
-            <a:ext cx="11274552" cy="548640"/>
+            <a:off x="457200" y="6126480"/>
+            <a:ext cx="11274552" cy="371856"/>
           </a:xfrm>
           <a:prstGeom prst="rect">
             <a:avLst/>
@@ -43793,8 +43793,8 @@
         </p:nvSpPr>
         <p:spPr>
           <a:xfrm>
-            <a:off x="658368" y="5980176"/>
-            <a:ext cx="10927080" cy="512064"/>
+            <a:off x="658368" y="6144768"/>
+            <a:ext cx="10927080" cy="335280"/>
           </a:xfrm>
           <a:prstGeom prst="rect">
             <a:avLst/>
@@ -43818,7 +43818,7 @@
                 <a:ea typeface="Inter" pitchFamily="34" charset="-122"/>
                 <a:cs typeface="Inter" pitchFamily="34" charset="-120"/>
               </a:rPr>
-              <a:t>VW ST GEORGE went $128.27 to $141.89, stepping up in June. Ask what changed that month.</a:t>
+              <a:t>VW St George went $128.27 to $141.89, stepping up in June. Ask what changed that month.</a:t>
             </a:r>
             <a:endParaRPr lang="en-US" sz="1600" dirty="0"/>
           </a:p>
@@ -46387,8 +46387,8 @@
         </p:nvSpPr>
         <p:spPr>
           <a:xfrm>
-            <a:off x="457200" y="5961888"/>
-            <a:ext cx="11274552" cy="548640"/>
+            <a:off x="457200" y="6126480"/>
+            <a:ext cx="11274552" cy="371856"/>
           </a:xfrm>
           <a:prstGeom prst="rect">
             <a:avLst/>
@@ -46407,8 +46407,8 @@
         </p:nvSpPr>
         <p:spPr>
           <a:xfrm>
-            <a:off x="658368" y="5980176"/>
-            <a:ext cx="10927080" cy="512064"/>
+            <a:off x="658368" y="6144768"/>
+            <a:ext cx="10927080" cy="335280"/>
           </a:xfrm>
           <a:prstGeom prst="rect">
             <a:avLst/>
@@ -46432,7 +46432,7 @@
                 <a:ea typeface="Inter" pitchFamily="34" charset="-122"/>
                 <a:cs typeface="Inter" pitchFamily="34" charset="-120"/>
               </a:rPr>
-              <a:t>VW ST GEORGE went $224 to $298, stepping up in June. Ask what changed that month.</a:t>
+              <a:t>VW St George went $224 to $298, stepping up in June. Ask what changed that month.</a:t>
             </a:r>
             <a:endParaRPr lang="en-US" sz="1600" dirty="0"/>
           </a:p>
@@ -49001,8 +49001,8 @@
         </p:nvSpPr>
         <p:spPr>
           <a:xfrm>
-            <a:off x="457200" y="5961888"/>
-            <a:ext cx="11274552" cy="548640"/>
+            <a:off x="457200" y="6126480"/>
+            <a:ext cx="11274552" cy="371856"/>
           </a:xfrm>
           <a:prstGeom prst="rect">
             <a:avLst/>
@@ -49021,8 +49021,8 @@
         </p:nvSpPr>
         <p:spPr>
           <a:xfrm>
-            <a:off x="658368" y="5980176"/>
-            <a:ext cx="10927080" cy="512064"/>
+            <a:off x="658368" y="6144768"/>
+            <a:ext cx="10927080" cy="335280"/>
           </a:xfrm>
           <a:prstGeom prst="rect">
             <a:avLst/>
@@ -49046,7 +49046,7 @@
                 <a:ea typeface="Inter" pitchFamily="34" charset="-122"/>
                 <a:cs typeface="Inter" pitchFamily="34" charset="-120"/>
               </a:rPr>
-              <a:t>ACURA went 39.4% to 46.6%, stepping up in April. Ask what changed that month.</a:t>
+              <a:t>Acura went 39.4% to 46.6%, stepping up in April. Ask what changed that month.</a:t>
             </a:r>
             <a:endParaRPr lang="en-US" sz="1600" dirty="0"/>
           </a:p>
@@ -51615,8 +51615,8 @@
         </p:nvSpPr>
         <p:spPr>
           <a:xfrm>
-            <a:off x="457200" y="5961888"/>
-            <a:ext cx="11274552" cy="548640"/>
+            <a:off x="457200" y="6126480"/>
+            <a:ext cx="11274552" cy="371856"/>
           </a:xfrm>
           <a:prstGeom prst="rect">
             <a:avLst/>
@@ -51635,8 +51635,8 @@
         </p:nvSpPr>
         <p:spPr>
           <a:xfrm>
-            <a:off x="658368" y="5980176"/>
-            <a:ext cx="10927080" cy="512064"/>
+            <a:off x="658368" y="6144768"/>
+            <a:ext cx="10927080" cy="335280"/>
           </a:xfrm>
           <a:prstGeom prst="rect">
             <a:avLst/>
@@ -51660,7 +51660,7 @@
                 <a:ea typeface="Inter" pitchFamily="34" charset="-122"/>
                 <a:cs typeface="Inter" pitchFamily="34" charset="-120"/>
               </a:rPr>
-              <a:t>AUDI HENDERSON went 21.1% to 31.7%, stepping up in May. Ask what changed that month.</a:t>
+              <a:t>Audi Henderson went 21.1% to 31.7%, stepping up in May. Ask what changed that month.</a:t>
             </a:r>
             <a:endParaRPr lang="en-US" sz="1600" dirty="0"/>
           </a:p>
@@ -54229,8 +54229,8 @@
         </p:nvSpPr>
         <p:spPr>
           <a:xfrm>
-            <a:off x="457200" y="5961888"/>
-            <a:ext cx="11274552" cy="548640"/>
+            <a:off x="457200" y="6126480"/>
+            <a:ext cx="11274552" cy="371856"/>
           </a:xfrm>
           <a:prstGeom prst="rect">
             <a:avLst/>
@@ -54249,8 +54249,8 @@
         </p:nvSpPr>
         <p:spPr>
           <a:xfrm>
-            <a:off x="658368" y="5980176"/>
-            <a:ext cx="10927080" cy="512064"/>
+            <a:off x="658368" y="6144768"/>
+            <a:ext cx="10927080" cy="335280"/>
           </a:xfrm>
           <a:prstGeom prst="rect">
             <a:avLst/>
@@ -54274,7 +54274,7 @@
                 <a:ea typeface="Inter" pitchFamily="34" charset="-122"/>
                 <a:cs typeface="Inter" pitchFamily="34" charset="-120"/>
               </a:rPr>
-              <a:t>MAZDA went 10.1% to 19.3%, stepping up in August. Ask what changed that month.</a:t>
+              <a:t>Mazda went 10.1% to 19.3%, stepping up in August. Ask what changed that month.</a:t>
             </a:r>
             <a:endParaRPr lang="en-US" sz="1600" dirty="0"/>
           </a:p>
@@ -56843,8 +56843,8 @@
         </p:nvSpPr>
         <p:spPr>
           <a:xfrm>
-            <a:off x="457200" y="5961888"/>
-            <a:ext cx="11274552" cy="548640"/>
+            <a:off x="457200" y="6126480"/>
+            <a:ext cx="11274552" cy="371856"/>
           </a:xfrm>
           <a:prstGeom prst="rect">
             <a:avLst/>
@@ -56863,8 +56863,8 @@
         </p:nvSpPr>
         <p:spPr>
           <a:xfrm>
-            <a:off x="658368" y="5980176"/>
-            <a:ext cx="10927080" cy="512064"/>
+            <a:off x="658368" y="6144768"/>
+            <a:ext cx="10927080" cy="335280"/>
           </a:xfrm>
           <a:prstGeom prst="rect">
             <a:avLst/>
@@ -56888,7 +56888,7 @@
                 <a:ea typeface="Inter" pitchFamily="34" charset="-122"/>
                 <a:cs typeface="Inter" pitchFamily="34" charset="-120"/>
               </a:rPr>
-              <a:t>MAZDA went 5.2% to 14.1%, stepping up in August. Ask what changed that month.</a:t>
+              <a:t>Mazda went 5.2% to 14.1%, stepping up in August. Ask what changed that month.</a:t>
             </a:r>
             <a:endParaRPr lang="en-US" sz="1600" dirty="0"/>
           </a:p>

--- a/day2-deck/decks/Who's Moving Now - Review.pptx
+++ b/day2-deck/decks/Who's Moving Now - Review.pptx
@@ -16289,7 +16289,7 @@
                 <a:ea typeface="Inter" pitchFamily="34" charset="-122"/>
                 <a:cs typeface="Inter" pitchFamily="34" charset="-120"/>
               </a:rPr>
-              <a:t>THE CP ENGINE · WHO'S MOVING NOW</a:t>
+              <a:t>CUSTOMER PAY · WHO'S MOVING NOW</a:t>
             </a:r>
             <a:endParaRPr lang="en-US" sz="1400" dirty="0"/>
           </a:p>
@@ -16656,7 +16656,7 @@
         <p:spPr>
           <a:xfrm>
             <a:off x="3657600" y="1993392"/>
-            <a:ext cx="1645920" cy="731520"/>
+            <a:ext cx="1783080" cy="731520"/>
           </a:xfrm>
           <a:prstGeom prst="rect">
             <a:avLst/>
@@ -16674,13 +16674,41 @@
             <a:r>
               <a:rPr lang="en-US" sz="1400" dirty="0">
                 <a:solidFill>
-                  <a:srgbClr val="1A1A1A"/>
-                </a:solidFill>
-                <a:latin typeface="Inter" pitchFamily="34" charset="0"/>
-                <a:ea typeface="Inter" pitchFamily="34" charset="-122"/>
-                <a:cs typeface="Inter" pitchFamily="34" charset="-120"/>
-              </a:rPr>
-              <a:t>$155K → $209K</a:t>
+                  <a:srgbClr val="595959"/>
+                </a:solidFill>
+                <a:latin typeface="Inter" pitchFamily="34" charset="0"/>
+                <a:ea typeface="Inter" pitchFamily="34" charset="-122"/>
+                <a:cs typeface="Inter" pitchFamily="34" charset="-120"/>
+              </a:rPr>
+              <a:t>$155K  </a:t>
+            </a:r>
+            <a:pPr indent="0" marL="0">
+              <a:buNone/>
+            </a:pPr>
+            <a:r>
+              <a:rPr lang="en-US" sz="1400" b="1" dirty="0">
+                <a:solidFill>
+                  <a:srgbClr val="0B7A4A"/>
+                </a:solidFill>
+                <a:latin typeface="Inter" pitchFamily="34" charset="0"/>
+                <a:ea typeface="Inter" pitchFamily="34" charset="-122"/>
+                <a:cs typeface="Inter" pitchFamily="34" charset="-120"/>
+              </a:rPr>
+              <a:t>→  </a:t>
+            </a:r>
+            <a:pPr indent="0" marL="0">
+              <a:buNone/>
+            </a:pPr>
+            <a:r>
+              <a:rPr lang="en-US" sz="1400" b="1" dirty="0">
+                <a:solidFill>
+                  <a:srgbClr val="0B7A4A"/>
+                </a:solidFill>
+                <a:latin typeface="Inter" pitchFamily="34" charset="0"/>
+                <a:ea typeface="Inter" pitchFamily="34" charset="-122"/>
+                <a:cs typeface="Inter" pitchFamily="34" charset="-120"/>
+              </a:rPr>
+              <a:t>$209K</a:t>
             </a:r>
             <a:endParaRPr lang="en-US" sz="1400" dirty="0"/>
           </a:p>
@@ -16867,7 +16895,7 @@
         <p:spPr>
           <a:xfrm>
             <a:off x="3657600" y="2724912"/>
-            <a:ext cx="1645920" cy="731520"/>
+            <a:ext cx="1783080" cy="731520"/>
           </a:xfrm>
           <a:prstGeom prst="rect">
             <a:avLst/>
@@ -16885,13 +16913,41 @@
             <a:r>
               <a:rPr lang="en-US" sz="1400" dirty="0">
                 <a:solidFill>
-                  <a:srgbClr val="1A1A1A"/>
-                </a:solidFill>
-                <a:latin typeface="Inter" pitchFamily="34" charset="0"/>
-                <a:ea typeface="Inter" pitchFamily="34" charset="-122"/>
-                <a:cs typeface="Inter" pitchFamily="34" charset="-120"/>
-              </a:rPr>
-              <a:t>$85K → $112K</a:t>
+                  <a:srgbClr val="595959"/>
+                </a:solidFill>
+                <a:latin typeface="Inter" pitchFamily="34" charset="0"/>
+                <a:ea typeface="Inter" pitchFamily="34" charset="-122"/>
+                <a:cs typeface="Inter" pitchFamily="34" charset="-120"/>
+              </a:rPr>
+              <a:t>$85K  </a:t>
+            </a:r>
+            <a:pPr indent="0" marL="0">
+              <a:buNone/>
+            </a:pPr>
+            <a:r>
+              <a:rPr lang="en-US" sz="1400" b="1" dirty="0">
+                <a:solidFill>
+                  <a:srgbClr val="0B7A4A"/>
+                </a:solidFill>
+                <a:latin typeface="Inter" pitchFamily="34" charset="0"/>
+                <a:ea typeface="Inter" pitchFamily="34" charset="-122"/>
+                <a:cs typeface="Inter" pitchFamily="34" charset="-120"/>
+              </a:rPr>
+              <a:t>→  </a:t>
+            </a:r>
+            <a:pPr indent="0" marL="0">
+              <a:buNone/>
+            </a:pPr>
+            <a:r>
+              <a:rPr lang="en-US" sz="1400" b="1" dirty="0">
+                <a:solidFill>
+                  <a:srgbClr val="0B7A4A"/>
+                </a:solidFill>
+                <a:latin typeface="Inter" pitchFamily="34" charset="0"/>
+                <a:ea typeface="Inter" pitchFamily="34" charset="-122"/>
+                <a:cs typeface="Inter" pitchFamily="34" charset="-120"/>
+              </a:rPr>
+              <a:t>$112K</a:t>
             </a:r>
             <a:endParaRPr lang="en-US" sz="1400" dirty="0"/>
           </a:p>
@@ -17098,7 +17154,7 @@
         <p:spPr>
           <a:xfrm>
             <a:off x="3657600" y="3456432"/>
-            <a:ext cx="1645920" cy="731520"/>
+            <a:ext cx="1783080" cy="731520"/>
           </a:xfrm>
           <a:prstGeom prst="rect">
             <a:avLst/>
@@ -17116,13 +17172,41 @@
             <a:r>
               <a:rPr lang="en-US" sz="1400" dirty="0">
                 <a:solidFill>
-                  <a:srgbClr val="1A1A1A"/>
-                </a:solidFill>
-                <a:latin typeface="Inter" pitchFamily="34" charset="0"/>
-                <a:ea typeface="Inter" pitchFamily="34" charset="-122"/>
-                <a:cs typeface="Inter" pitchFamily="34" charset="-120"/>
-              </a:rPr>
-              <a:t>$218K → $279K</a:t>
+                  <a:srgbClr val="595959"/>
+                </a:solidFill>
+                <a:latin typeface="Inter" pitchFamily="34" charset="0"/>
+                <a:ea typeface="Inter" pitchFamily="34" charset="-122"/>
+                <a:cs typeface="Inter" pitchFamily="34" charset="-120"/>
+              </a:rPr>
+              <a:t>$218K  </a:t>
+            </a:r>
+            <a:pPr indent="0" marL="0">
+              <a:buNone/>
+            </a:pPr>
+            <a:r>
+              <a:rPr lang="en-US" sz="1400" b="1" dirty="0">
+                <a:solidFill>
+                  <a:srgbClr val="0B7A4A"/>
+                </a:solidFill>
+                <a:latin typeface="Inter" pitchFamily="34" charset="0"/>
+                <a:ea typeface="Inter" pitchFamily="34" charset="-122"/>
+                <a:cs typeface="Inter" pitchFamily="34" charset="-120"/>
+              </a:rPr>
+              <a:t>→  </a:t>
+            </a:r>
+            <a:pPr indent="0" marL="0">
+              <a:buNone/>
+            </a:pPr>
+            <a:r>
+              <a:rPr lang="en-US" sz="1400" b="1" dirty="0">
+                <a:solidFill>
+                  <a:srgbClr val="0B7A4A"/>
+                </a:solidFill>
+                <a:latin typeface="Inter" pitchFamily="34" charset="0"/>
+                <a:ea typeface="Inter" pitchFamily="34" charset="-122"/>
+                <a:cs typeface="Inter" pitchFamily="34" charset="-120"/>
+              </a:rPr>
+              <a:t>$279K</a:t>
             </a:r>
             <a:endParaRPr lang="en-US" sz="1400" dirty="0"/>
           </a:p>
@@ -17309,7 +17393,7 @@
         <p:spPr>
           <a:xfrm>
             <a:off x="3657600" y="4187952"/>
-            <a:ext cx="1645920" cy="731520"/>
+            <a:ext cx="1783080" cy="731520"/>
           </a:xfrm>
           <a:prstGeom prst="rect">
             <a:avLst/>
@@ -17327,13 +17411,41 @@
             <a:r>
               <a:rPr lang="en-US" sz="1400" dirty="0">
                 <a:solidFill>
-                  <a:srgbClr val="1A1A1A"/>
-                </a:solidFill>
-                <a:latin typeface="Inter" pitchFamily="34" charset="0"/>
-                <a:ea typeface="Inter" pitchFamily="34" charset="-122"/>
-                <a:cs typeface="Inter" pitchFamily="34" charset="-120"/>
-              </a:rPr>
-              <a:t>$54K → $66K</a:t>
+                  <a:srgbClr val="595959"/>
+                </a:solidFill>
+                <a:latin typeface="Inter" pitchFamily="34" charset="0"/>
+                <a:ea typeface="Inter" pitchFamily="34" charset="-122"/>
+                <a:cs typeface="Inter" pitchFamily="34" charset="-120"/>
+              </a:rPr>
+              <a:t>$54K  </a:t>
+            </a:r>
+            <a:pPr indent="0" marL="0">
+              <a:buNone/>
+            </a:pPr>
+            <a:r>
+              <a:rPr lang="en-US" sz="1400" b="1" dirty="0">
+                <a:solidFill>
+                  <a:srgbClr val="0B7A4A"/>
+                </a:solidFill>
+                <a:latin typeface="Inter" pitchFamily="34" charset="0"/>
+                <a:ea typeface="Inter" pitchFamily="34" charset="-122"/>
+                <a:cs typeface="Inter" pitchFamily="34" charset="-120"/>
+              </a:rPr>
+              <a:t>→  </a:t>
+            </a:r>
+            <a:pPr indent="0" marL="0">
+              <a:buNone/>
+            </a:pPr>
+            <a:r>
+              <a:rPr lang="en-US" sz="1400" b="1" dirty="0">
+                <a:solidFill>
+                  <a:srgbClr val="0B7A4A"/>
+                </a:solidFill>
+                <a:latin typeface="Inter" pitchFamily="34" charset="0"/>
+                <a:ea typeface="Inter" pitchFamily="34" charset="-122"/>
+                <a:cs typeface="Inter" pitchFamily="34" charset="-120"/>
+              </a:rPr>
+              <a:t>$66K</a:t>
             </a:r>
             <a:endParaRPr lang="en-US" sz="1400" dirty="0"/>
           </a:p>
@@ -17540,7 +17652,7 @@
         <p:spPr>
           <a:xfrm>
             <a:off x="3657600" y="4919472"/>
-            <a:ext cx="1645920" cy="731520"/>
+            <a:ext cx="1783080" cy="731520"/>
           </a:xfrm>
           <a:prstGeom prst="rect">
             <a:avLst/>
@@ -17558,13 +17670,41 @@
             <a:r>
               <a:rPr lang="en-US" sz="1400" dirty="0">
                 <a:solidFill>
-                  <a:srgbClr val="1A1A1A"/>
-                </a:solidFill>
-                <a:latin typeface="Inter" pitchFamily="34" charset="0"/>
-                <a:ea typeface="Inter" pitchFamily="34" charset="-122"/>
-                <a:cs typeface="Inter" pitchFamily="34" charset="-120"/>
-              </a:rPr>
-              <a:t>$49K → $60K</a:t>
+                  <a:srgbClr val="595959"/>
+                </a:solidFill>
+                <a:latin typeface="Inter" pitchFamily="34" charset="0"/>
+                <a:ea typeface="Inter" pitchFamily="34" charset="-122"/>
+                <a:cs typeface="Inter" pitchFamily="34" charset="-120"/>
+              </a:rPr>
+              <a:t>$49K  </a:t>
+            </a:r>
+            <a:pPr indent="0" marL="0">
+              <a:buNone/>
+            </a:pPr>
+            <a:r>
+              <a:rPr lang="en-US" sz="1400" b="1" dirty="0">
+                <a:solidFill>
+                  <a:srgbClr val="0B7A4A"/>
+                </a:solidFill>
+                <a:latin typeface="Inter" pitchFamily="34" charset="0"/>
+                <a:ea typeface="Inter" pitchFamily="34" charset="-122"/>
+                <a:cs typeface="Inter" pitchFamily="34" charset="-120"/>
+              </a:rPr>
+              <a:t>→  </a:t>
+            </a:r>
+            <a:pPr indent="0" marL="0">
+              <a:buNone/>
+            </a:pPr>
+            <a:r>
+              <a:rPr lang="en-US" sz="1400" b="1" dirty="0">
+                <a:solidFill>
+                  <a:srgbClr val="0B7A4A"/>
+                </a:solidFill>
+                <a:latin typeface="Inter" pitchFamily="34" charset="0"/>
+                <a:ea typeface="Inter" pitchFamily="34" charset="-122"/>
+                <a:cs typeface="Inter" pitchFamily="34" charset="-120"/>
+              </a:rPr>
+              <a:t>$60K</a:t>
             </a:r>
             <a:endParaRPr lang="en-US" sz="1400" dirty="0"/>
           </a:p>
@@ -18175,7 +18315,7 @@
         <p:spPr>
           <a:xfrm>
             <a:off x="3657600" y="1993392"/>
-            <a:ext cx="1645920" cy="731520"/>
+            <a:ext cx="1783080" cy="731520"/>
           </a:xfrm>
           <a:prstGeom prst="rect">
             <a:avLst/>
@@ -18193,13 +18333,41 @@
             <a:r>
               <a:rPr lang="en-US" sz="1400" dirty="0">
                 <a:solidFill>
-                  <a:srgbClr val="1A1A1A"/>
-                </a:solidFill>
-                <a:latin typeface="Inter" pitchFamily="34" charset="0"/>
-                <a:ea typeface="Inter" pitchFamily="34" charset="-122"/>
-                <a:cs typeface="Inter" pitchFamily="34" charset="-120"/>
-              </a:rPr>
-              <a:t>2.5% → 10.7%</a:t>
+                  <a:srgbClr val="595959"/>
+                </a:solidFill>
+                <a:latin typeface="Inter" pitchFamily="34" charset="0"/>
+                <a:ea typeface="Inter" pitchFamily="34" charset="-122"/>
+                <a:cs typeface="Inter" pitchFamily="34" charset="-120"/>
+              </a:rPr>
+              <a:t>2.5%  </a:t>
+            </a:r>
+            <a:pPr indent="0" marL="0">
+              <a:buNone/>
+            </a:pPr>
+            <a:r>
+              <a:rPr lang="en-US" sz="1400" b="1" dirty="0">
+                <a:solidFill>
+                  <a:srgbClr val="0B7A4A"/>
+                </a:solidFill>
+                <a:latin typeface="Inter" pitchFamily="34" charset="0"/>
+                <a:ea typeface="Inter" pitchFamily="34" charset="-122"/>
+                <a:cs typeface="Inter" pitchFamily="34" charset="-120"/>
+              </a:rPr>
+              <a:t>→  </a:t>
+            </a:r>
+            <a:pPr indent="0" marL="0">
+              <a:buNone/>
+            </a:pPr>
+            <a:r>
+              <a:rPr lang="en-US" sz="1400" b="1" dirty="0">
+                <a:solidFill>
+                  <a:srgbClr val="0B7A4A"/>
+                </a:solidFill>
+                <a:latin typeface="Inter" pitchFamily="34" charset="0"/>
+                <a:ea typeface="Inter" pitchFamily="34" charset="-122"/>
+                <a:cs typeface="Inter" pitchFamily="34" charset="-120"/>
+              </a:rPr>
+              <a:t>10.7%</a:t>
             </a:r>
             <a:endParaRPr lang="en-US" sz="1400" dirty="0"/>
           </a:p>
@@ -18386,7 +18554,7 @@
         <p:spPr>
           <a:xfrm>
             <a:off x="3657600" y="2724912"/>
-            <a:ext cx="1645920" cy="731520"/>
+            <a:ext cx="1783080" cy="731520"/>
           </a:xfrm>
           <a:prstGeom prst="rect">
             <a:avLst/>
@@ -18404,13 +18572,41 @@
             <a:r>
               <a:rPr lang="en-US" sz="1400" dirty="0">
                 <a:solidFill>
-                  <a:srgbClr val="1A1A1A"/>
-                </a:solidFill>
-                <a:latin typeface="Inter" pitchFamily="34" charset="0"/>
-                <a:ea typeface="Inter" pitchFamily="34" charset="-122"/>
-                <a:cs typeface="Inter" pitchFamily="34" charset="-120"/>
-              </a:rPr>
-              <a:t>4.2% → 8.1%</a:t>
+                  <a:srgbClr val="595959"/>
+                </a:solidFill>
+                <a:latin typeface="Inter" pitchFamily="34" charset="0"/>
+                <a:ea typeface="Inter" pitchFamily="34" charset="-122"/>
+                <a:cs typeface="Inter" pitchFamily="34" charset="-120"/>
+              </a:rPr>
+              <a:t>4.2%  </a:t>
+            </a:r>
+            <a:pPr indent="0" marL="0">
+              <a:buNone/>
+            </a:pPr>
+            <a:r>
+              <a:rPr lang="en-US" sz="1400" b="1" dirty="0">
+                <a:solidFill>
+                  <a:srgbClr val="0B7A4A"/>
+                </a:solidFill>
+                <a:latin typeface="Inter" pitchFamily="34" charset="0"/>
+                <a:ea typeface="Inter" pitchFamily="34" charset="-122"/>
+                <a:cs typeface="Inter" pitchFamily="34" charset="-120"/>
+              </a:rPr>
+              <a:t>→  </a:t>
+            </a:r>
+            <a:pPr indent="0" marL="0">
+              <a:buNone/>
+            </a:pPr>
+            <a:r>
+              <a:rPr lang="en-US" sz="1400" b="1" dirty="0">
+                <a:solidFill>
+                  <a:srgbClr val="0B7A4A"/>
+                </a:solidFill>
+                <a:latin typeface="Inter" pitchFamily="34" charset="0"/>
+                <a:ea typeface="Inter" pitchFamily="34" charset="-122"/>
+                <a:cs typeface="Inter" pitchFamily="34" charset="-120"/>
+              </a:rPr>
+              <a:t>8.1%</a:t>
             </a:r>
             <a:endParaRPr lang="en-US" sz="1400" dirty="0"/>
           </a:p>
@@ -18617,7 +18813,7 @@
         <p:spPr>
           <a:xfrm>
             <a:off x="3657600" y="3456432"/>
-            <a:ext cx="1645920" cy="731520"/>
+            <a:ext cx="1783080" cy="731520"/>
           </a:xfrm>
           <a:prstGeom prst="rect">
             <a:avLst/>
@@ -18635,13 +18831,41 @@
             <a:r>
               <a:rPr lang="en-US" sz="1400" dirty="0">
                 <a:solidFill>
-                  <a:srgbClr val="1A1A1A"/>
-                </a:solidFill>
-                <a:latin typeface="Inter" pitchFamily="34" charset="0"/>
-                <a:ea typeface="Inter" pitchFamily="34" charset="-122"/>
-                <a:cs typeface="Inter" pitchFamily="34" charset="-120"/>
-              </a:rPr>
-              <a:t>1.2% → 4.9%</a:t>
+                  <a:srgbClr val="595959"/>
+                </a:solidFill>
+                <a:latin typeface="Inter" pitchFamily="34" charset="0"/>
+                <a:ea typeface="Inter" pitchFamily="34" charset="-122"/>
+                <a:cs typeface="Inter" pitchFamily="34" charset="-120"/>
+              </a:rPr>
+              <a:t>1.2%  </a:t>
+            </a:r>
+            <a:pPr indent="0" marL="0">
+              <a:buNone/>
+            </a:pPr>
+            <a:r>
+              <a:rPr lang="en-US" sz="1400" b="1" dirty="0">
+                <a:solidFill>
+                  <a:srgbClr val="0B7A4A"/>
+                </a:solidFill>
+                <a:latin typeface="Inter" pitchFamily="34" charset="0"/>
+                <a:ea typeface="Inter" pitchFamily="34" charset="-122"/>
+                <a:cs typeface="Inter" pitchFamily="34" charset="-120"/>
+              </a:rPr>
+              <a:t>→  </a:t>
+            </a:r>
+            <a:pPr indent="0" marL="0">
+              <a:buNone/>
+            </a:pPr>
+            <a:r>
+              <a:rPr lang="en-US" sz="1400" b="1" dirty="0">
+                <a:solidFill>
+                  <a:srgbClr val="0B7A4A"/>
+                </a:solidFill>
+                <a:latin typeface="Inter" pitchFamily="34" charset="0"/>
+                <a:ea typeface="Inter" pitchFamily="34" charset="-122"/>
+                <a:cs typeface="Inter" pitchFamily="34" charset="-120"/>
+              </a:rPr>
+              <a:t>4.9%</a:t>
             </a:r>
             <a:endParaRPr lang="en-US" sz="1400" dirty="0"/>
           </a:p>
@@ -18828,7 +19052,7 @@
         <p:spPr>
           <a:xfrm>
             <a:off x="3657600" y="4187952"/>
-            <a:ext cx="1645920" cy="731520"/>
+            <a:ext cx="1783080" cy="731520"/>
           </a:xfrm>
           <a:prstGeom prst="rect">
             <a:avLst/>
@@ -18846,13 +19070,41 @@
             <a:r>
               <a:rPr lang="en-US" sz="1400" dirty="0">
                 <a:solidFill>
-                  <a:srgbClr val="1A1A1A"/>
-                </a:solidFill>
-                <a:latin typeface="Inter" pitchFamily="34" charset="0"/>
-                <a:ea typeface="Inter" pitchFamily="34" charset="-122"/>
-                <a:cs typeface="Inter" pitchFamily="34" charset="-120"/>
-              </a:rPr>
-              <a:t>6.7% → 10.1%</a:t>
+                  <a:srgbClr val="595959"/>
+                </a:solidFill>
+                <a:latin typeface="Inter" pitchFamily="34" charset="0"/>
+                <a:ea typeface="Inter" pitchFamily="34" charset="-122"/>
+                <a:cs typeface="Inter" pitchFamily="34" charset="-120"/>
+              </a:rPr>
+              <a:t>6.7%  </a:t>
+            </a:r>
+            <a:pPr indent="0" marL="0">
+              <a:buNone/>
+            </a:pPr>
+            <a:r>
+              <a:rPr lang="en-US" sz="1400" b="1" dirty="0">
+                <a:solidFill>
+                  <a:srgbClr val="0B7A4A"/>
+                </a:solidFill>
+                <a:latin typeface="Inter" pitchFamily="34" charset="0"/>
+                <a:ea typeface="Inter" pitchFamily="34" charset="-122"/>
+                <a:cs typeface="Inter" pitchFamily="34" charset="-120"/>
+              </a:rPr>
+              <a:t>→  </a:t>
+            </a:r>
+            <a:pPr indent="0" marL="0">
+              <a:buNone/>
+            </a:pPr>
+            <a:r>
+              <a:rPr lang="en-US" sz="1400" b="1" dirty="0">
+                <a:solidFill>
+                  <a:srgbClr val="0B7A4A"/>
+                </a:solidFill>
+                <a:latin typeface="Inter" pitchFamily="34" charset="0"/>
+                <a:ea typeface="Inter" pitchFamily="34" charset="-122"/>
+                <a:cs typeface="Inter" pitchFamily="34" charset="-120"/>
+              </a:rPr>
+              <a:t>10.1%</a:t>
             </a:r>
             <a:endParaRPr lang="en-US" sz="1400" dirty="0"/>
           </a:p>
@@ -19059,7 +19311,7 @@
         <p:spPr>
           <a:xfrm>
             <a:off x="3657600" y="4919472"/>
-            <a:ext cx="1645920" cy="731520"/>
+            <a:ext cx="1783080" cy="731520"/>
           </a:xfrm>
           <a:prstGeom prst="rect">
             <a:avLst/>
@@ -19077,13 +19329,41 @@
             <a:r>
               <a:rPr lang="en-US" sz="1400" dirty="0">
                 <a:solidFill>
-                  <a:srgbClr val="1A1A1A"/>
-                </a:solidFill>
-                <a:latin typeface="Inter" pitchFamily="34" charset="0"/>
-                <a:ea typeface="Inter" pitchFamily="34" charset="-122"/>
-                <a:cs typeface="Inter" pitchFamily="34" charset="-120"/>
-              </a:rPr>
-              <a:t>0.0% → 2.5%</a:t>
+                  <a:srgbClr val="595959"/>
+                </a:solidFill>
+                <a:latin typeface="Inter" pitchFamily="34" charset="0"/>
+                <a:ea typeface="Inter" pitchFamily="34" charset="-122"/>
+                <a:cs typeface="Inter" pitchFamily="34" charset="-120"/>
+              </a:rPr>
+              <a:t>0.0%  </a:t>
+            </a:r>
+            <a:pPr indent="0" marL="0">
+              <a:buNone/>
+            </a:pPr>
+            <a:r>
+              <a:rPr lang="en-US" sz="1400" b="1" dirty="0">
+                <a:solidFill>
+                  <a:srgbClr val="0B7A4A"/>
+                </a:solidFill>
+                <a:latin typeface="Inter" pitchFamily="34" charset="0"/>
+                <a:ea typeface="Inter" pitchFamily="34" charset="-122"/>
+                <a:cs typeface="Inter" pitchFamily="34" charset="-120"/>
+              </a:rPr>
+              <a:t>→  </a:t>
+            </a:r>
+            <a:pPr indent="0" marL="0">
+              <a:buNone/>
+            </a:pPr>
+            <a:r>
+              <a:rPr lang="en-US" sz="1400" b="1" dirty="0">
+                <a:solidFill>
+                  <a:srgbClr val="0B7A4A"/>
+                </a:solidFill>
+                <a:latin typeface="Inter" pitchFamily="34" charset="0"/>
+                <a:ea typeface="Inter" pitchFamily="34" charset="-122"/>
+                <a:cs typeface="Inter" pitchFamily="34" charset="-120"/>
+              </a:rPr>
+              <a:t>2.5%</a:t>
             </a:r>
             <a:endParaRPr lang="en-US" sz="1400" dirty="0"/>
           </a:p>
@@ -19327,7 +19607,7 @@
                 <a:ea typeface="Inter" pitchFamily="34" charset="-122"/>
                 <a:cs typeface="Inter" pitchFamily="34" charset="-120"/>
               </a:rPr>
-              <a:t>THE CP ENGINE · WHO'S MOVING NOW</a:t>
+              <a:t>CUSTOMER PAY · WHO'S MOVING NOW</a:t>
             </a:r>
             <a:endParaRPr lang="en-US" sz="1400" dirty="0"/>
           </a:p>
@@ -19694,7 +19974,7 @@
         <p:spPr>
           <a:xfrm>
             <a:off x="3657600" y="1993392"/>
-            <a:ext cx="1645920" cy="731520"/>
+            <a:ext cx="1783080" cy="731520"/>
           </a:xfrm>
           <a:prstGeom prst="rect">
             <a:avLst/>
@@ -19712,13 +19992,41 @@
             <a:r>
               <a:rPr lang="en-US" sz="1400" dirty="0">
                 <a:solidFill>
-                  <a:srgbClr val="1A1A1A"/>
-                </a:solidFill>
-                <a:latin typeface="Inter" pitchFamily="34" charset="0"/>
-                <a:ea typeface="Inter" pitchFamily="34" charset="-122"/>
-                <a:cs typeface="Inter" pitchFamily="34" charset="-120"/>
-              </a:rPr>
-              <a:t>425 → 570</a:t>
+                  <a:srgbClr val="595959"/>
+                </a:solidFill>
+                <a:latin typeface="Inter" pitchFamily="34" charset="0"/>
+                <a:ea typeface="Inter" pitchFamily="34" charset="-122"/>
+                <a:cs typeface="Inter" pitchFamily="34" charset="-120"/>
+              </a:rPr>
+              <a:t>425  </a:t>
+            </a:r>
+            <a:pPr indent="0" marL="0">
+              <a:buNone/>
+            </a:pPr>
+            <a:r>
+              <a:rPr lang="en-US" sz="1400" b="1" dirty="0">
+                <a:solidFill>
+                  <a:srgbClr val="0B7A4A"/>
+                </a:solidFill>
+                <a:latin typeface="Inter" pitchFamily="34" charset="0"/>
+                <a:ea typeface="Inter" pitchFamily="34" charset="-122"/>
+                <a:cs typeface="Inter" pitchFamily="34" charset="-120"/>
+              </a:rPr>
+              <a:t>→  </a:t>
+            </a:r>
+            <a:pPr indent="0" marL="0">
+              <a:buNone/>
+            </a:pPr>
+            <a:r>
+              <a:rPr lang="en-US" sz="1400" b="1" dirty="0">
+                <a:solidFill>
+                  <a:srgbClr val="0B7A4A"/>
+                </a:solidFill>
+                <a:latin typeface="Inter" pitchFamily="34" charset="0"/>
+                <a:ea typeface="Inter" pitchFamily="34" charset="-122"/>
+                <a:cs typeface="Inter" pitchFamily="34" charset="-120"/>
+              </a:rPr>
+              <a:t>570</a:t>
             </a:r>
             <a:endParaRPr lang="en-US" sz="1400" dirty="0"/>
           </a:p>
@@ -19905,7 +20213,7 @@
         <p:spPr>
           <a:xfrm>
             <a:off x="3657600" y="2724912"/>
-            <a:ext cx="1645920" cy="731520"/>
+            <a:ext cx="1783080" cy="731520"/>
           </a:xfrm>
           <a:prstGeom prst="rect">
             <a:avLst/>
@@ -19923,13 +20231,41 @@
             <a:r>
               <a:rPr lang="en-US" sz="1400" dirty="0">
                 <a:solidFill>
-                  <a:srgbClr val="1A1A1A"/>
-                </a:solidFill>
-                <a:latin typeface="Inter" pitchFamily="34" charset="0"/>
-                <a:ea typeface="Inter" pitchFamily="34" charset="-122"/>
-                <a:cs typeface="Inter" pitchFamily="34" charset="-120"/>
-              </a:rPr>
-              <a:t>543 → 667</a:t>
+                  <a:srgbClr val="595959"/>
+                </a:solidFill>
+                <a:latin typeface="Inter" pitchFamily="34" charset="0"/>
+                <a:ea typeface="Inter" pitchFamily="34" charset="-122"/>
+                <a:cs typeface="Inter" pitchFamily="34" charset="-120"/>
+              </a:rPr>
+              <a:t>543  </a:t>
+            </a:r>
+            <a:pPr indent="0" marL="0">
+              <a:buNone/>
+            </a:pPr>
+            <a:r>
+              <a:rPr lang="en-US" sz="1400" b="1" dirty="0">
+                <a:solidFill>
+                  <a:srgbClr val="0B7A4A"/>
+                </a:solidFill>
+                <a:latin typeface="Inter" pitchFamily="34" charset="0"/>
+                <a:ea typeface="Inter" pitchFamily="34" charset="-122"/>
+                <a:cs typeface="Inter" pitchFamily="34" charset="-120"/>
+              </a:rPr>
+              <a:t>→  </a:t>
+            </a:r>
+            <a:pPr indent="0" marL="0">
+              <a:buNone/>
+            </a:pPr>
+            <a:r>
+              <a:rPr lang="en-US" sz="1400" b="1" dirty="0">
+                <a:solidFill>
+                  <a:srgbClr val="0B7A4A"/>
+                </a:solidFill>
+                <a:latin typeface="Inter" pitchFamily="34" charset="0"/>
+                <a:ea typeface="Inter" pitchFamily="34" charset="-122"/>
+                <a:cs typeface="Inter" pitchFamily="34" charset="-120"/>
+              </a:rPr>
+              <a:t>667</a:t>
             </a:r>
             <a:endParaRPr lang="en-US" sz="1400" dirty="0"/>
           </a:p>
@@ -20136,7 +20472,7 @@
         <p:spPr>
           <a:xfrm>
             <a:off x="3657600" y="3456432"/>
-            <a:ext cx="1645920" cy="731520"/>
+            <a:ext cx="1783080" cy="731520"/>
           </a:xfrm>
           <a:prstGeom prst="rect">
             <a:avLst/>
@@ -20154,13 +20490,41 @@
             <a:r>
               <a:rPr lang="en-US" sz="1400" dirty="0">
                 <a:solidFill>
-                  <a:srgbClr val="1A1A1A"/>
-                </a:solidFill>
-                <a:latin typeface="Inter" pitchFamily="34" charset="0"/>
-                <a:ea typeface="Inter" pitchFamily="34" charset="-122"/>
-                <a:cs typeface="Inter" pitchFamily="34" charset="-120"/>
-              </a:rPr>
-              <a:t>350 → 415</a:t>
+                  <a:srgbClr val="595959"/>
+                </a:solidFill>
+                <a:latin typeface="Inter" pitchFamily="34" charset="0"/>
+                <a:ea typeface="Inter" pitchFamily="34" charset="-122"/>
+                <a:cs typeface="Inter" pitchFamily="34" charset="-120"/>
+              </a:rPr>
+              <a:t>350  </a:t>
+            </a:r>
+            <a:pPr indent="0" marL="0">
+              <a:buNone/>
+            </a:pPr>
+            <a:r>
+              <a:rPr lang="en-US" sz="1400" b="1" dirty="0">
+                <a:solidFill>
+                  <a:srgbClr val="0B7A4A"/>
+                </a:solidFill>
+                <a:latin typeface="Inter" pitchFamily="34" charset="0"/>
+                <a:ea typeface="Inter" pitchFamily="34" charset="-122"/>
+                <a:cs typeface="Inter" pitchFamily="34" charset="-120"/>
+              </a:rPr>
+              <a:t>→  </a:t>
+            </a:r>
+            <a:pPr indent="0" marL="0">
+              <a:buNone/>
+            </a:pPr>
+            <a:r>
+              <a:rPr lang="en-US" sz="1400" b="1" dirty="0">
+                <a:solidFill>
+                  <a:srgbClr val="0B7A4A"/>
+                </a:solidFill>
+                <a:latin typeface="Inter" pitchFamily="34" charset="0"/>
+                <a:ea typeface="Inter" pitchFamily="34" charset="-122"/>
+                <a:cs typeface="Inter" pitchFamily="34" charset="-120"/>
+              </a:rPr>
+              <a:t>415</a:t>
             </a:r>
             <a:endParaRPr lang="en-US" sz="1400" dirty="0"/>
           </a:p>
@@ -20347,7 +20711,7 @@
         <p:spPr>
           <a:xfrm>
             <a:off x="3657600" y="4187952"/>
-            <a:ext cx="1645920" cy="731520"/>
+            <a:ext cx="1783080" cy="731520"/>
           </a:xfrm>
           <a:prstGeom prst="rect">
             <a:avLst/>
@@ -20365,13 +20729,41 @@
             <a:r>
               <a:rPr lang="en-US" sz="1400" dirty="0">
                 <a:solidFill>
-                  <a:srgbClr val="1A1A1A"/>
-                </a:solidFill>
-                <a:latin typeface="Inter" pitchFamily="34" charset="0"/>
-                <a:ea typeface="Inter" pitchFamily="34" charset="-122"/>
-                <a:cs typeface="Inter" pitchFamily="34" charset="-120"/>
-              </a:rPr>
-              <a:t>578 → 669</a:t>
+                  <a:srgbClr val="595959"/>
+                </a:solidFill>
+                <a:latin typeface="Inter" pitchFamily="34" charset="0"/>
+                <a:ea typeface="Inter" pitchFamily="34" charset="-122"/>
+                <a:cs typeface="Inter" pitchFamily="34" charset="-120"/>
+              </a:rPr>
+              <a:t>578  </a:t>
+            </a:r>
+            <a:pPr indent="0" marL="0">
+              <a:buNone/>
+            </a:pPr>
+            <a:r>
+              <a:rPr lang="en-US" sz="1400" b="1" dirty="0">
+                <a:solidFill>
+                  <a:srgbClr val="0B7A4A"/>
+                </a:solidFill>
+                <a:latin typeface="Inter" pitchFamily="34" charset="0"/>
+                <a:ea typeface="Inter" pitchFamily="34" charset="-122"/>
+                <a:cs typeface="Inter" pitchFamily="34" charset="-120"/>
+              </a:rPr>
+              <a:t>→  </a:t>
+            </a:r>
+            <a:pPr indent="0" marL="0">
+              <a:buNone/>
+            </a:pPr>
+            <a:r>
+              <a:rPr lang="en-US" sz="1400" b="1" dirty="0">
+                <a:solidFill>
+                  <a:srgbClr val="0B7A4A"/>
+                </a:solidFill>
+                <a:latin typeface="Inter" pitchFamily="34" charset="0"/>
+                <a:ea typeface="Inter" pitchFamily="34" charset="-122"/>
+                <a:cs typeface="Inter" pitchFamily="34" charset="-120"/>
+              </a:rPr>
+              <a:t>669</a:t>
             </a:r>
             <a:endParaRPr lang="en-US" sz="1400" dirty="0"/>
           </a:p>
@@ -20578,7 +20970,7 @@
         <p:spPr>
           <a:xfrm>
             <a:off x="3657600" y="4919472"/>
-            <a:ext cx="1645920" cy="731520"/>
+            <a:ext cx="1783080" cy="731520"/>
           </a:xfrm>
           <a:prstGeom prst="rect">
             <a:avLst/>
@@ -20596,13 +20988,41 @@
             <a:r>
               <a:rPr lang="en-US" sz="1400" dirty="0">
                 <a:solidFill>
-                  <a:srgbClr val="1A1A1A"/>
-                </a:solidFill>
-                <a:latin typeface="Inter" pitchFamily="34" charset="0"/>
-                <a:ea typeface="Inter" pitchFamily="34" charset="-122"/>
-                <a:cs typeface="Inter" pitchFamily="34" charset="-120"/>
-              </a:rPr>
-              <a:t>397 → 459</a:t>
+                  <a:srgbClr val="595959"/>
+                </a:solidFill>
+                <a:latin typeface="Inter" pitchFamily="34" charset="0"/>
+                <a:ea typeface="Inter" pitchFamily="34" charset="-122"/>
+                <a:cs typeface="Inter" pitchFamily="34" charset="-120"/>
+              </a:rPr>
+              <a:t>397  </a:t>
+            </a:r>
+            <a:pPr indent="0" marL="0">
+              <a:buNone/>
+            </a:pPr>
+            <a:r>
+              <a:rPr lang="en-US" sz="1400" b="1" dirty="0">
+                <a:solidFill>
+                  <a:srgbClr val="0B7A4A"/>
+                </a:solidFill>
+                <a:latin typeface="Inter" pitchFamily="34" charset="0"/>
+                <a:ea typeface="Inter" pitchFamily="34" charset="-122"/>
+                <a:cs typeface="Inter" pitchFamily="34" charset="-120"/>
+              </a:rPr>
+              <a:t>→  </a:t>
+            </a:r>
+            <a:pPr indent="0" marL="0">
+              <a:buNone/>
+            </a:pPr>
+            <a:r>
+              <a:rPr lang="en-US" sz="1400" b="1" dirty="0">
+                <a:solidFill>
+                  <a:srgbClr val="0B7A4A"/>
+                </a:solidFill>
+                <a:latin typeface="Inter" pitchFamily="34" charset="0"/>
+                <a:ea typeface="Inter" pitchFamily="34" charset="-122"/>
+                <a:cs typeface="Inter" pitchFamily="34" charset="-120"/>
+              </a:rPr>
+              <a:t>459</a:t>
             </a:r>
             <a:endParaRPr lang="en-US" sz="1400" dirty="0"/>
           </a:p>
@@ -20846,7 +21266,7 @@
                 <a:ea typeface="Inter" pitchFamily="34" charset="-122"/>
                 <a:cs typeface="Inter" pitchFamily="34" charset="-120"/>
               </a:rPr>
-              <a:t>THE CP ENGINE · WHO'S MOVING NOW</a:t>
+              <a:t>CUSTOMER PAY · WHO'S MOVING NOW</a:t>
             </a:r>
             <a:endParaRPr lang="en-US" sz="1400" dirty="0"/>
           </a:p>
@@ -21213,7 +21633,7 @@
         <p:spPr>
           <a:xfrm>
             <a:off x="3657600" y="1993392"/>
-            <a:ext cx="1645920" cy="731520"/>
+            <a:ext cx="1783080" cy="731520"/>
           </a:xfrm>
           <a:prstGeom prst="rect">
             <a:avLst/>
@@ -21231,13 +21651,41 @@
             <a:r>
               <a:rPr lang="en-US" sz="1400" dirty="0">
                 <a:solidFill>
-                  <a:srgbClr val="1A1A1A"/>
-                </a:solidFill>
-                <a:latin typeface="Inter" pitchFamily="34" charset="0"/>
-                <a:ea typeface="Inter" pitchFamily="34" charset="-122"/>
-                <a:cs typeface="Inter" pitchFamily="34" charset="-120"/>
-              </a:rPr>
-              <a:t>1.35 → 1.65</a:t>
+                  <a:srgbClr val="595959"/>
+                </a:solidFill>
+                <a:latin typeface="Inter" pitchFamily="34" charset="0"/>
+                <a:ea typeface="Inter" pitchFamily="34" charset="-122"/>
+                <a:cs typeface="Inter" pitchFamily="34" charset="-120"/>
+              </a:rPr>
+              <a:t>1.35  </a:t>
+            </a:r>
+            <a:pPr indent="0" marL="0">
+              <a:buNone/>
+            </a:pPr>
+            <a:r>
+              <a:rPr lang="en-US" sz="1400" b="1" dirty="0">
+                <a:solidFill>
+                  <a:srgbClr val="0B7A4A"/>
+                </a:solidFill>
+                <a:latin typeface="Inter" pitchFamily="34" charset="0"/>
+                <a:ea typeface="Inter" pitchFamily="34" charset="-122"/>
+                <a:cs typeface="Inter" pitchFamily="34" charset="-120"/>
+              </a:rPr>
+              <a:t>→  </a:t>
+            </a:r>
+            <a:pPr indent="0" marL="0">
+              <a:buNone/>
+            </a:pPr>
+            <a:r>
+              <a:rPr lang="en-US" sz="1400" b="1" dirty="0">
+                <a:solidFill>
+                  <a:srgbClr val="0B7A4A"/>
+                </a:solidFill>
+                <a:latin typeface="Inter" pitchFamily="34" charset="0"/>
+                <a:ea typeface="Inter" pitchFamily="34" charset="-122"/>
+                <a:cs typeface="Inter" pitchFamily="34" charset="-120"/>
+              </a:rPr>
+              <a:t>1.65</a:t>
             </a:r>
             <a:endParaRPr lang="en-US" sz="1400" dirty="0"/>
           </a:p>
@@ -21424,7 +21872,7 @@
         <p:spPr>
           <a:xfrm>
             <a:off x="3657600" y="2724912"/>
-            <a:ext cx="1645920" cy="731520"/>
+            <a:ext cx="1783080" cy="731520"/>
           </a:xfrm>
           <a:prstGeom prst="rect">
             <a:avLst/>
@@ -21442,13 +21890,41 @@
             <a:r>
               <a:rPr lang="en-US" sz="1400" dirty="0">
                 <a:solidFill>
-                  <a:srgbClr val="1A1A1A"/>
-                </a:solidFill>
-                <a:latin typeface="Inter" pitchFamily="34" charset="0"/>
-                <a:ea typeface="Inter" pitchFamily="34" charset="-122"/>
-                <a:cs typeface="Inter" pitchFamily="34" charset="-120"/>
-              </a:rPr>
-              <a:t>1.56 → 1.76</a:t>
+                  <a:srgbClr val="595959"/>
+                </a:solidFill>
+                <a:latin typeface="Inter" pitchFamily="34" charset="0"/>
+                <a:ea typeface="Inter" pitchFamily="34" charset="-122"/>
+                <a:cs typeface="Inter" pitchFamily="34" charset="-120"/>
+              </a:rPr>
+              <a:t>1.56  </a:t>
+            </a:r>
+            <a:pPr indent="0" marL="0">
+              <a:buNone/>
+            </a:pPr>
+            <a:r>
+              <a:rPr lang="en-US" sz="1400" b="1" dirty="0">
+                <a:solidFill>
+                  <a:srgbClr val="0B7A4A"/>
+                </a:solidFill>
+                <a:latin typeface="Inter" pitchFamily="34" charset="0"/>
+                <a:ea typeface="Inter" pitchFamily="34" charset="-122"/>
+                <a:cs typeface="Inter" pitchFamily="34" charset="-120"/>
+              </a:rPr>
+              <a:t>→  </a:t>
+            </a:r>
+            <a:pPr indent="0" marL="0">
+              <a:buNone/>
+            </a:pPr>
+            <a:r>
+              <a:rPr lang="en-US" sz="1400" b="1" dirty="0">
+                <a:solidFill>
+                  <a:srgbClr val="0B7A4A"/>
+                </a:solidFill>
+                <a:latin typeface="Inter" pitchFamily="34" charset="0"/>
+                <a:ea typeface="Inter" pitchFamily="34" charset="-122"/>
+                <a:cs typeface="Inter" pitchFamily="34" charset="-120"/>
+              </a:rPr>
+              <a:t>1.76</a:t>
             </a:r>
             <a:endParaRPr lang="en-US" sz="1400" dirty="0"/>
           </a:p>
@@ -21655,7 +22131,7 @@
         <p:spPr>
           <a:xfrm>
             <a:off x="3657600" y="3456432"/>
-            <a:ext cx="1645920" cy="731520"/>
+            <a:ext cx="1783080" cy="731520"/>
           </a:xfrm>
           <a:prstGeom prst="rect">
             <a:avLst/>
@@ -21673,13 +22149,41 @@
             <a:r>
               <a:rPr lang="en-US" sz="1400" dirty="0">
                 <a:solidFill>
-                  <a:srgbClr val="1A1A1A"/>
-                </a:solidFill>
-                <a:latin typeface="Inter" pitchFamily="34" charset="0"/>
-                <a:ea typeface="Inter" pitchFamily="34" charset="-122"/>
-                <a:cs typeface="Inter" pitchFamily="34" charset="-120"/>
-              </a:rPr>
-              <a:t>1.37 → 1.54</a:t>
+                  <a:srgbClr val="595959"/>
+                </a:solidFill>
+                <a:latin typeface="Inter" pitchFamily="34" charset="0"/>
+                <a:ea typeface="Inter" pitchFamily="34" charset="-122"/>
+                <a:cs typeface="Inter" pitchFamily="34" charset="-120"/>
+              </a:rPr>
+              <a:t>1.37  </a:t>
+            </a:r>
+            <a:pPr indent="0" marL="0">
+              <a:buNone/>
+            </a:pPr>
+            <a:r>
+              <a:rPr lang="en-US" sz="1400" b="1" dirty="0">
+                <a:solidFill>
+                  <a:srgbClr val="0B7A4A"/>
+                </a:solidFill>
+                <a:latin typeface="Inter" pitchFamily="34" charset="0"/>
+                <a:ea typeface="Inter" pitchFamily="34" charset="-122"/>
+                <a:cs typeface="Inter" pitchFamily="34" charset="-120"/>
+              </a:rPr>
+              <a:t>→  </a:t>
+            </a:r>
+            <a:pPr indent="0" marL="0">
+              <a:buNone/>
+            </a:pPr>
+            <a:r>
+              <a:rPr lang="en-US" sz="1400" b="1" dirty="0">
+                <a:solidFill>
+                  <a:srgbClr val="0B7A4A"/>
+                </a:solidFill>
+                <a:latin typeface="Inter" pitchFamily="34" charset="0"/>
+                <a:ea typeface="Inter" pitchFamily="34" charset="-122"/>
+                <a:cs typeface="Inter" pitchFamily="34" charset="-120"/>
+              </a:rPr>
+              <a:t>1.54</a:t>
             </a:r>
             <a:endParaRPr lang="en-US" sz="1400" dirty="0"/>
           </a:p>
@@ -21866,7 +22370,7 @@
         <p:spPr>
           <a:xfrm>
             <a:off x="3657600" y="4187952"/>
-            <a:ext cx="1645920" cy="731520"/>
+            <a:ext cx="1783080" cy="731520"/>
           </a:xfrm>
           <a:prstGeom prst="rect">
             <a:avLst/>
@@ -21884,13 +22388,41 @@
             <a:r>
               <a:rPr lang="en-US" sz="1400" dirty="0">
                 <a:solidFill>
-                  <a:srgbClr val="1A1A1A"/>
-                </a:solidFill>
-                <a:latin typeface="Inter" pitchFamily="34" charset="0"/>
-                <a:ea typeface="Inter" pitchFamily="34" charset="-122"/>
-                <a:cs typeface="Inter" pitchFamily="34" charset="-120"/>
-              </a:rPr>
-              <a:t>1.23 → 1.38</a:t>
+                  <a:srgbClr val="595959"/>
+                </a:solidFill>
+                <a:latin typeface="Inter" pitchFamily="34" charset="0"/>
+                <a:ea typeface="Inter" pitchFamily="34" charset="-122"/>
+                <a:cs typeface="Inter" pitchFamily="34" charset="-120"/>
+              </a:rPr>
+              <a:t>1.23  </a:t>
+            </a:r>
+            <a:pPr indent="0" marL="0">
+              <a:buNone/>
+            </a:pPr>
+            <a:r>
+              <a:rPr lang="en-US" sz="1400" b="1" dirty="0">
+                <a:solidFill>
+                  <a:srgbClr val="0B7A4A"/>
+                </a:solidFill>
+                <a:latin typeface="Inter" pitchFamily="34" charset="0"/>
+                <a:ea typeface="Inter" pitchFamily="34" charset="-122"/>
+                <a:cs typeface="Inter" pitchFamily="34" charset="-120"/>
+              </a:rPr>
+              <a:t>→  </a:t>
+            </a:r>
+            <a:pPr indent="0" marL="0">
+              <a:buNone/>
+            </a:pPr>
+            <a:r>
+              <a:rPr lang="en-US" sz="1400" b="1" dirty="0">
+                <a:solidFill>
+                  <a:srgbClr val="0B7A4A"/>
+                </a:solidFill>
+                <a:latin typeface="Inter" pitchFamily="34" charset="0"/>
+                <a:ea typeface="Inter" pitchFamily="34" charset="-122"/>
+                <a:cs typeface="Inter" pitchFamily="34" charset="-120"/>
+              </a:rPr>
+              <a:t>1.38</a:t>
             </a:r>
             <a:endParaRPr lang="en-US" sz="1400" dirty="0"/>
           </a:p>
@@ -22097,7 +22629,7 @@
         <p:spPr>
           <a:xfrm>
             <a:off x="3657600" y="4919472"/>
-            <a:ext cx="1645920" cy="731520"/>
+            <a:ext cx="1783080" cy="731520"/>
           </a:xfrm>
           <a:prstGeom prst="rect">
             <a:avLst/>
@@ -22115,13 +22647,41 @@
             <a:r>
               <a:rPr lang="en-US" sz="1400" dirty="0">
                 <a:solidFill>
-                  <a:srgbClr val="1A1A1A"/>
-                </a:solidFill>
-                <a:latin typeface="Inter" pitchFamily="34" charset="0"/>
-                <a:ea typeface="Inter" pitchFamily="34" charset="-122"/>
-                <a:cs typeface="Inter" pitchFamily="34" charset="-120"/>
-              </a:rPr>
-              <a:t>1.65 → 1.79</a:t>
+                  <a:srgbClr val="595959"/>
+                </a:solidFill>
+                <a:latin typeface="Inter" pitchFamily="34" charset="0"/>
+                <a:ea typeface="Inter" pitchFamily="34" charset="-122"/>
+                <a:cs typeface="Inter" pitchFamily="34" charset="-120"/>
+              </a:rPr>
+              <a:t>1.65  </a:t>
+            </a:r>
+            <a:pPr indent="0" marL="0">
+              <a:buNone/>
+            </a:pPr>
+            <a:r>
+              <a:rPr lang="en-US" sz="1400" b="1" dirty="0">
+                <a:solidFill>
+                  <a:srgbClr val="0B7A4A"/>
+                </a:solidFill>
+                <a:latin typeface="Inter" pitchFamily="34" charset="0"/>
+                <a:ea typeface="Inter" pitchFamily="34" charset="-122"/>
+                <a:cs typeface="Inter" pitchFamily="34" charset="-120"/>
+              </a:rPr>
+              <a:t>→  </a:t>
+            </a:r>
+            <a:pPr indent="0" marL="0">
+              <a:buNone/>
+            </a:pPr>
+            <a:r>
+              <a:rPr lang="en-US" sz="1400" b="1" dirty="0">
+                <a:solidFill>
+                  <a:srgbClr val="0B7A4A"/>
+                </a:solidFill>
+                <a:latin typeface="Inter" pitchFamily="34" charset="0"/>
+                <a:ea typeface="Inter" pitchFamily="34" charset="-122"/>
+                <a:cs typeface="Inter" pitchFamily="34" charset="-120"/>
+              </a:rPr>
+              <a:t>1.79</a:t>
             </a:r>
             <a:endParaRPr lang="en-US" sz="1400" dirty="0"/>
           </a:p>
@@ -22365,7 +22925,7 @@
                 <a:ea typeface="Inter" pitchFamily="34" charset="-122"/>
                 <a:cs typeface="Inter" pitchFamily="34" charset="-120"/>
               </a:rPr>
-              <a:t>THE CP ENGINE · WHO'S MOVING NOW</a:t>
+              <a:t>CUSTOMER PAY · WHO'S MOVING NOW</a:t>
             </a:r>
             <a:endParaRPr lang="en-US" sz="1400" dirty="0"/>
           </a:p>
@@ -22732,7 +23292,7 @@
         <p:spPr>
           <a:xfrm>
             <a:off x="3657600" y="1993392"/>
-            <a:ext cx="1645920" cy="731520"/>
+            <a:ext cx="1783080" cy="731520"/>
           </a:xfrm>
           <a:prstGeom prst="rect">
             <a:avLst/>
@@ -22750,13 +23310,41 @@
             <a:r>
               <a:rPr lang="en-US" sz="1400" dirty="0">
                 <a:solidFill>
-                  <a:srgbClr val="1A1A1A"/>
-                </a:solidFill>
-                <a:latin typeface="Inter" pitchFamily="34" charset="0"/>
-                <a:ea typeface="Inter" pitchFamily="34" charset="-122"/>
-                <a:cs typeface="Inter" pitchFamily="34" charset="-120"/>
-              </a:rPr>
-              <a:t>$128.27 → $141.89</a:t>
+                  <a:srgbClr val="595959"/>
+                </a:solidFill>
+                <a:latin typeface="Inter" pitchFamily="34" charset="0"/>
+                <a:ea typeface="Inter" pitchFamily="34" charset="-122"/>
+                <a:cs typeface="Inter" pitchFamily="34" charset="-120"/>
+              </a:rPr>
+              <a:t>$128.27  </a:t>
+            </a:r>
+            <a:pPr indent="0" marL="0">
+              <a:buNone/>
+            </a:pPr>
+            <a:r>
+              <a:rPr lang="en-US" sz="1400" b="1" dirty="0">
+                <a:solidFill>
+                  <a:srgbClr val="0B7A4A"/>
+                </a:solidFill>
+                <a:latin typeface="Inter" pitchFamily="34" charset="0"/>
+                <a:ea typeface="Inter" pitchFamily="34" charset="-122"/>
+                <a:cs typeface="Inter" pitchFamily="34" charset="-120"/>
+              </a:rPr>
+              <a:t>→  </a:t>
+            </a:r>
+            <a:pPr indent="0" marL="0">
+              <a:buNone/>
+            </a:pPr>
+            <a:r>
+              <a:rPr lang="en-US" sz="1400" b="1" dirty="0">
+                <a:solidFill>
+                  <a:srgbClr val="0B7A4A"/>
+                </a:solidFill>
+                <a:latin typeface="Inter" pitchFamily="34" charset="0"/>
+                <a:ea typeface="Inter" pitchFamily="34" charset="-122"/>
+                <a:cs typeface="Inter" pitchFamily="34" charset="-120"/>
+              </a:rPr>
+              <a:t>$141.89</a:t>
             </a:r>
             <a:endParaRPr lang="en-US" sz="1400" dirty="0"/>
           </a:p>
@@ -22943,7 +23531,7 @@
         <p:spPr>
           <a:xfrm>
             <a:off x="3657600" y="2724912"/>
-            <a:ext cx="1645920" cy="731520"/>
+            <a:ext cx="1783080" cy="731520"/>
           </a:xfrm>
           <a:prstGeom prst="rect">
             <a:avLst/>
@@ -22961,13 +23549,41 @@
             <a:r>
               <a:rPr lang="en-US" sz="1400" dirty="0">
                 <a:solidFill>
-                  <a:srgbClr val="1A1A1A"/>
-                </a:solidFill>
-                <a:latin typeface="Inter" pitchFamily="34" charset="0"/>
-                <a:ea typeface="Inter" pitchFamily="34" charset="-122"/>
-                <a:cs typeface="Inter" pitchFamily="34" charset="-120"/>
-              </a:rPr>
-              <a:t>$227.34 → $244.12</a:t>
+                  <a:srgbClr val="595959"/>
+                </a:solidFill>
+                <a:latin typeface="Inter" pitchFamily="34" charset="0"/>
+                <a:ea typeface="Inter" pitchFamily="34" charset="-122"/>
+                <a:cs typeface="Inter" pitchFamily="34" charset="-120"/>
+              </a:rPr>
+              <a:t>$227.34  </a:t>
+            </a:r>
+            <a:pPr indent="0" marL="0">
+              <a:buNone/>
+            </a:pPr>
+            <a:r>
+              <a:rPr lang="en-US" sz="1400" b="1" dirty="0">
+                <a:solidFill>
+                  <a:srgbClr val="0B7A4A"/>
+                </a:solidFill>
+                <a:latin typeface="Inter" pitchFamily="34" charset="0"/>
+                <a:ea typeface="Inter" pitchFamily="34" charset="-122"/>
+                <a:cs typeface="Inter" pitchFamily="34" charset="-120"/>
+              </a:rPr>
+              <a:t>→  </a:t>
+            </a:r>
+            <a:pPr indent="0" marL="0">
+              <a:buNone/>
+            </a:pPr>
+            <a:r>
+              <a:rPr lang="en-US" sz="1400" b="1" dirty="0">
+                <a:solidFill>
+                  <a:srgbClr val="0B7A4A"/>
+                </a:solidFill>
+                <a:latin typeface="Inter" pitchFamily="34" charset="0"/>
+                <a:ea typeface="Inter" pitchFamily="34" charset="-122"/>
+                <a:cs typeface="Inter" pitchFamily="34" charset="-120"/>
+              </a:rPr>
+              <a:t>$244.12</a:t>
             </a:r>
             <a:endParaRPr lang="en-US" sz="1400" dirty="0"/>
           </a:p>
@@ -23174,7 +23790,7 @@
         <p:spPr>
           <a:xfrm>
             <a:off x="3657600" y="3456432"/>
-            <a:ext cx="1645920" cy="731520"/>
+            <a:ext cx="1783080" cy="731520"/>
           </a:xfrm>
           <a:prstGeom prst="rect">
             <a:avLst/>
@@ -23192,13 +23808,41 @@
             <a:r>
               <a:rPr lang="en-US" sz="1400" dirty="0">
                 <a:solidFill>
-                  <a:srgbClr val="1A1A1A"/>
-                </a:solidFill>
-                <a:latin typeface="Inter" pitchFamily="34" charset="0"/>
-                <a:ea typeface="Inter" pitchFamily="34" charset="-122"/>
-                <a:cs typeface="Inter" pitchFamily="34" charset="-120"/>
-              </a:rPr>
-              <a:t>$139.40 → $147.93</a:t>
+                  <a:srgbClr val="595959"/>
+                </a:solidFill>
+                <a:latin typeface="Inter" pitchFamily="34" charset="0"/>
+                <a:ea typeface="Inter" pitchFamily="34" charset="-122"/>
+                <a:cs typeface="Inter" pitchFamily="34" charset="-120"/>
+              </a:rPr>
+              <a:t>$139.40  </a:t>
+            </a:r>
+            <a:pPr indent="0" marL="0">
+              <a:buNone/>
+            </a:pPr>
+            <a:r>
+              <a:rPr lang="en-US" sz="1400" b="1" dirty="0">
+                <a:solidFill>
+                  <a:srgbClr val="0B7A4A"/>
+                </a:solidFill>
+                <a:latin typeface="Inter" pitchFamily="34" charset="0"/>
+                <a:ea typeface="Inter" pitchFamily="34" charset="-122"/>
+                <a:cs typeface="Inter" pitchFamily="34" charset="-120"/>
+              </a:rPr>
+              <a:t>→  </a:t>
+            </a:r>
+            <a:pPr indent="0" marL="0">
+              <a:buNone/>
+            </a:pPr>
+            <a:r>
+              <a:rPr lang="en-US" sz="1400" b="1" dirty="0">
+                <a:solidFill>
+                  <a:srgbClr val="0B7A4A"/>
+                </a:solidFill>
+                <a:latin typeface="Inter" pitchFamily="34" charset="0"/>
+                <a:ea typeface="Inter" pitchFamily="34" charset="-122"/>
+                <a:cs typeface="Inter" pitchFamily="34" charset="-120"/>
+              </a:rPr>
+              <a:t>$147.93</a:t>
             </a:r>
             <a:endParaRPr lang="en-US" sz="1400" dirty="0"/>
           </a:p>
@@ -23385,7 +24029,7 @@
         <p:spPr>
           <a:xfrm>
             <a:off x="3657600" y="4187952"/>
-            <a:ext cx="1645920" cy="731520"/>
+            <a:ext cx="1783080" cy="731520"/>
           </a:xfrm>
           <a:prstGeom prst="rect">
             <a:avLst/>
@@ -23403,13 +24047,41 @@
             <a:r>
               <a:rPr lang="en-US" sz="1400" dirty="0">
                 <a:solidFill>
-                  <a:srgbClr val="1A1A1A"/>
-                </a:solidFill>
-                <a:latin typeface="Inter" pitchFamily="34" charset="0"/>
-                <a:ea typeface="Inter" pitchFamily="34" charset="-122"/>
-                <a:cs typeface="Inter" pitchFamily="34" charset="-120"/>
-              </a:rPr>
-              <a:t>$142.56 → $150.72</a:t>
+                  <a:srgbClr val="595959"/>
+                </a:solidFill>
+                <a:latin typeface="Inter" pitchFamily="34" charset="0"/>
+                <a:ea typeface="Inter" pitchFamily="34" charset="-122"/>
+                <a:cs typeface="Inter" pitchFamily="34" charset="-120"/>
+              </a:rPr>
+              <a:t>$142.56  </a:t>
+            </a:r>
+            <a:pPr indent="0" marL="0">
+              <a:buNone/>
+            </a:pPr>
+            <a:r>
+              <a:rPr lang="en-US" sz="1400" b="1" dirty="0">
+                <a:solidFill>
+                  <a:srgbClr val="0B7A4A"/>
+                </a:solidFill>
+                <a:latin typeface="Inter" pitchFamily="34" charset="0"/>
+                <a:ea typeface="Inter" pitchFamily="34" charset="-122"/>
+                <a:cs typeface="Inter" pitchFamily="34" charset="-120"/>
+              </a:rPr>
+              <a:t>→  </a:t>
+            </a:r>
+            <a:pPr indent="0" marL="0">
+              <a:buNone/>
+            </a:pPr>
+            <a:r>
+              <a:rPr lang="en-US" sz="1400" b="1" dirty="0">
+                <a:solidFill>
+                  <a:srgbClr val="0B7A4A"/>
+                </a:solidFill>
+                <a:latin typeface="Inter" pitchFamily="34" charset="0"/>
+                <a:ea typeface="Inter" pitchFamily="34" charset="-122"/>
+                <a:cs typeface="Inter" pitchFamily="34" charset="-120"/>
+              </a:rPr>
+              <a:t>$150.72</a:t>
             </a:r>
             <a:endParaRPr lang="en-US" sz="1400" dirty="0"/>
           </a:p>
@@ -23616,7 +24288,7 @@
         <p:spPr>
           <a:xfrm>
             <a:off x="3657600" y="4919472"/>
-            <a:ext cx="1645920" cy="731520"/>
+            <a:ext cx="1783080" cy="731520"/>
           </a:xfrm>
           <a:prstGeom prst="rect">
             <a:avLst/>
@@ -23634,13 +24306,41 @@
             <a:r>
               <a:rPr lang="en-US" sz="1400" dirty="0">
                 <a:solidFill>
-                  <a:srgbClr val="1A1A1A"/>
-                </a:solidFill>
-                <a:latin typeface="Inter" pitchFamily="34" charset="0"/>
-                <a:ea typeface="Inter" pitchFamily="34" charset="-122"/>
-                <a:cs typeface="Inter" pitchFamily="34" charset="-120"/>
-              </a:rPr>
-              <a:t>$139.09 → $146.04</a:t>
+                  <a:srgbClr val="595959"/>
+                </a:solidFill>
+                <a:latin typeface="Inter" pitchFamily="34" charset="0"/>
+                <a:ea typeface="Inter" pitchFamily="34" charset="-122"/>
+                <a:cs typeface="Inter" pitchFamily="34" charset="-120"/>
+              </a:rPr>
+              <a:t>$139.09  </a:t>
+            </a:r>
+            <a:pPr indent="0" marL="0">
+              <a:buNone/>
+            </a:pPr>
+            <a:r>
+              <a:rPr lang="en-US" sz="1400" b="1" dirty="0">
+                <a:solidFill>
+                  <a:srgbClr val="0B7A4A"/>
+                </a:solidFill>
+                <a:latin typeface="Inter" pitchFamily="34" charset="0"/>
+                <a:ea typeface="Inter" pitchFamily="34" charset="-122"/>
+                <a:cs typeface="Inter" pitchFamily="34" charset="-120"/>
+              </a:rPr>
+              <a:t>→  </a:t>
+            </a:r>
+            <a:pPr indent="0" marL="0">
+              <a:buNone/>
+            </a:pPr>
+            <a:r>
+              <a:rPr lang="en-US" sz="1400" b="1" dirty="0">
+                <a:solidFill>
+                  <a:srgbClr val="0B7A4A"/>
+                </a:solidFill>
+                <a:latin typeface="Inter" pitchFamily="34" charset="0"/>
+                <a:ea typeface="Inter" pitchFamily="34" charset="-122"/>
+                <a:cs typeface="Inter" pitchFamily="34" charset="-120"/>
+              </a:rPr>
+              <a:t>$146.04</a:t>
             </a:r>
             <a:endParaRPr lang="en-US" sz="1400" dirty="0"/>
           </a:p>
@@ -23884,7 +24584,7 @@
                 <a:ea typeface="Inter" pitchFamily="34" charset="-122"/>
                 <a:cs typeface="Inter" pitchFamily="34" charset="-120"/>
               </a:rPr>
-              <a:t>THE CP ENGINE · WHO'S MOVING NOW</a:t>
+              <a:t>CUSTOMER PAY · WHO'S MOVING NOW</a:t>
             </a:r>
             <a:endParaRPr lang="en-US" sz="1400" dirty="0"/>
           </a:p>
@@ -24251,7 +24951,7 @@
         <p:spPr>
           <a:xfrm>
             <a:off x="3657600" y="1993392"/>
-            <a:ext cx="1645920" cy="731520"/>
+            <a:ext cx="1783080" cy="731520"/>
           </a:xfrm>
           <a:prstGeom prst="rect">
             <a:avLst/>
@@ -24269,13 +24969,41 @@
             <a:r>
               <a:rPr lang="en-US" sz="1400" dirty="0">
                 <a:solidFill>
-                  <a:srgbClr val="1A1A1A"/>
-                </a:solidFill>
-                <a:latin typeface="Inter" pitchFamily="34" charset="0"/>
-                <a:ea typeface="Inter" pitchFamily="34" charset="-122"/>
-                <a:cs typeface="Inter" pitchFamily="34" charset="-120"/>
-              </a:rPr>
-              <a:t>$224 → $298</a:t>
+                  <a:srgbClr val="595959"/>
+                </a:solidFill>
+                <a:latin typeface="Inter" pitchFamily="34" charset="0"/>
+                <a:ea typeface="Inter" pitchFamily="34" charset="-122"/>
+                <a:cs typeface="Inter" pitchFamily="34" charset="-120"/>
+              </a:rPr>
+              <a:t>$224  </a:t>
+            </a:r>
+            <a:pPr indent="0" marL="0">
+              <a:buNone/>
+            </a:pPr>
+            <a:r>
+              <a:rPr lang="en-US" sz="1400" b="1" dirty="0">
+                <a:solidFill>
+                  <a:srgbClr val="0B7A4A"/>
+                </a:solidFill>
+                <a:latin typeface="Inter" pitchFamily="34" charset="0"/>
+                <a:ea typeface="Inter" pitchFamily="34" charset="-122"/>
+                <a:cs typeface="Inter" pitchFamily="34" charset="-120"/>
+              </a:rPr>
+              <a:t>→  </a:t>
+            </a:r>
+            <a:pPr indent="0" marL="0">
+              <a:buNone/>
+            </a:pPr>
+            <a:r>
+              <a:rPr lang="en-US" sz="1400" b="1" dirty="0">
+                <a:solidFill>
+                  <a:srgbClr val="0B7A4A"/>
+                </a:solidFill>
+                <a:latin typeface="Inter" pitchFamily="34" charset="0"/>
+                <a:ea typeface="Inter" pitchFamily="34" charset="-122"/>
+                <a:cs typeface="Inter" pitchFamily="34" charset="-120"/>
+              </a:rPr>
+              <a:t>$298</a:t>
             </a:r>
             <a:endParaRPr lang="en-US" sz="1400" dirty="0"/>
           </a:p>
@@ -24462,7 +25190,7 @@
         <p:spPr>
           <a:xfrm>
             <a:off x="3657600" y="2724912"/>
-            <a:ext cx="1645920" cy="731520"/>
+            <a:ext cx="1783080" cy="731520"/>
           </a:xfrm>
           <a:prstGeom prst="rect">
             <a:avLst/>
@@ -24480,13 +25208,41 @@
             <a:r>
               <a:rPr lang="en-US" sz="1400" dirty="0">
                 <a:solidFill>
-                  <a:srgbClr val="1A1A1A"/>
-                </a:solidFill>
-                <a:latin typeface="Inter" pitchFamily="34" charset="0"/>
-                <a:ea typeface="Inter" pitchFamily="34" charset="-122"/>
-                <a:cs typeface="Inter" pitchFamily="34" charset="-120"/>
-              </a:rPr>
-              <a:t>$692 → $877</a:t>
+                  <a:srgbClr val="595959"/>
+                </a:solidFill>
+                <a:latin typeface="Inter" pitchFamily="34" charset="0"/>
+                <a:ea typeface="Inter" pitchFamily="34" charset="-122"/>
+                <a:cs typeface="Inter" pitchFamily="34" charset="-120"/>
+              </a:rPr>
+              <a:t>$692  </a:t>
+            </a:r>
+            <a:pPr indent="0" marL="0">
+              <a:buNone/>
+            </a:pPr>
+            <a:r>
+              <a:rPr lang="en-US" sz="1400" b="1" dirty="0">
+                <a:solidFill>
+                  <a:srgbClr val="0B7A4A"/>
+                </a:solidFill>
+                <a:latin typeface="Inter" pitchFamily="34" charset="0"/>
+                <a:ea typeface="Inter" pitchFamily="34" charset="-122"/>
+                <a:cs typeface="Inter" pitchFamily="34" charset="-120"/>
+              </a:rPr>
+              <a:t>→  </a:t>
+            </a:r>
+            <a:pPr indent="0" marL="0">
+              <a:buNone/>
+            </a:pPr>
+            <a:r>
+              <a:rPr lang="en-US" sz="1400" b="1" dirty="0">
+                <a:solidFill>
+                  <a:srgbClr val="0B7A4A"/>
+                </a:solidFill>
+                <a:latin typeface="Inter" pitchFamily="34" charset="0"/>
+                <a:ea typeface="Inter" pitchFamily="34" charset="-122"/>
+                <a:cs typeface="Inter" pitchFamily="34" charset="-120"/>
+              </a:rPr>
+              <a:t>$877</a:t>
             </a:r>
             <a:endParaRPr lang="en-US" sz="1400" dirty="0"/>
           </a:p>
@@ -24693,7 +25449,7 @@
         <p:spPr>
           <a:xfrm>
             <a:off x="3657600" y="3456432"/>
-            <a:ext cx="1645920" cy="731520"/>
+            <a:ext cx="1783080" cy="731520"/>
           </a:xfrm>
           <a:prstGeom prst="rect">
             <a:avLst/>
@@ -24711,13 +25467,41 @@
             <a:r>
               <a:rPr lang="en-US" sz="1400" dirty="0">
                 <a:solidFill>
-                  <a:srgbClr val="1A1A1A"/>
-                </a:solidFill>
-                <a:latin typeface="Inter" pitchFamily="34" charset="0"/>
-                <a:ea typeface="Inter" pitchFamily="34" charset="-122"/>
-                <a:cs typeface="Inter" pitchFamily="34" charset="-120"/>
-              </a:rPr>
-              <a:t>$229 → $282</a:t>
+                  <a:srgbClr val="595959"/>
+                </a:solidFill>
+                <a:latin typeface="Inter" pitchFamily="34" charset="0"/>
+                <a:ea typeface="Inter" pitchFamily="34" charset="-122"/>
+                <a:cs typeface="Inter" pitchFamily="34" charset="-120"/>
+              </a:rPr>
+              <a:t>$229  </a:t>
+            </a:r>
+            <a:pPr indent="0" marL="0">
+              <a:buNone/>
+            </a:pPr>
+            <a:r>
+              <a:rPr lang="en-US" sz="1400" b="1" dirty="0">
+                <a:solidFill>
+                  <a:srgbClr val="0B7A4A"/>
+                </a:solidFill>
+                <a:latin typeface="Inter" pitchFamily="34" charset="0"/>
+                <a:ea typeface="Inter" pitchFamily="34" charset="-122"/>
+                <a:cs typeface="Inter" pitchFamily="34" charset="-120"/>
+              </a:rPr>
+              <a:t>→  </a:t>
+            </a:r>
+            <a:pPr indent="0" marL="0">
+              <a:buNone/>
+            </a:pPr>
+            <a:r>
+              <a:rPr lang="en-US" sz="1400" b="1" dirty="0">
+                <a:solidFill>
+                  <a:srgbClr val="0B7A4A"/>
+                </a:solidFill>
+                <a:latin typeface="Inter" pitchFamily="34" charset="0"/>
+                <a:ea typeface="Inter" pitchFamily="34" charset="-122"/>
+                <a:cs typeface="Inter" pitchFamily="34" charset="-120"/>
+              </a:rPr>
+              <a:t>$282</a:t>
             </a:r>
             <a:endParaRPr lang="en-US" sz="1400" dirty="0"/>
           </a:p>
@@ -24904,7 +25688,7 @@
         <p:spPr>
           <a:xfrm>
             <a:off x="3657600" y="4187952"/>
-            <a:ext cx="1645920" cy="731520"/>
+            <a:ext cx="1783080" cy="731520"/>
           </a:xfrm>
           <a:prstGeom prst="rect">
             <a:avLst/>
@@ -24922,13 +25706,41 @@
             <a:r>
               <a:rPr lang="en-US" sz="1400" dirty="0">
                 <a:solidFill>
-                  <a:srgbClr val="1A1A1A"/>
-                </a:solidFill>
-                <a:latin typeface="Inter" pitchFamily="34" charset="0"/>
-                <a:ea typeface="Inter" pitchFamily="34" charset="-122"/>
-                <a:cs typeface="Inter" pitchFamily="34" charset="-120"/>
-              </a:rPr>
-              <a:t>$200 → $234</a:t>
+                  <a:srgbClr val="595959"/>
+                </a:solidFill>
+                <a:latin typeface="Inter" pitchFamily="34" charset="0"/>
+                <a:ea typeface="Inter" pitchFamily="34" charset="-122"/>
+                <a:cs typeface="Inter" pitchFamily="34" charset="-120"/>
+              </a:rPr>
+              <a:t>$200  </a:t>
+            </a:r>
+            <a:pPr indent="0" marL="0">
+              <a:buNone/>
+            </a:pPr>
+            <a:r>
+              <a:rPr lang="en-US" sz="1400" b="1" dirty="0">
+                <a:solidFill>
+                  <a:srgbClr val="0B7A4A"/>
+                </a:solidFill>
+                <a:latin typeface="Inter" pitchFamily="34" charset="0"/>
+                <a:ea typeface="Inter" pitchFamily="34" charset="-122"/>
+                <a:cs typeface="Inter" pitchFamily="34" charset="-120"/>
+              </a:rPr>
+              <a:t>→  </a:t>
+            </a:r>
+            <a:pPr indent="0" marL="0">
+              <a:buNone/>
+            </a:pPr>
+            <a:r>
+              <a:rPr lang="en-US" sz="1400" b="1" dirty="0">
+                <a:solidFill>
+                  <a:srgbClr val="0B7A4A"/>
+                </a:solidFill>
+                <a:latin typeface="Inter" pitchFamily="34" charset="0"/>
+                <a:ea typeface="Inter" pitchFamily="34" charset="-122"/>
+                <a:cs typeface="Inter" pitchFamily="34" charset="-120"/>
+              </a:rPr>
+              <a:t>$234</a:t>
             </a:r>
             <a:endParaRPr lang="en-US" sz="1400" dirty="0"/>
           </a:p>
@@ -25135,7 +25947,7 @@
         <p:spPr>
           <a:xfrm>
             <a:off x="3657600" y="4919472"/>
-            <a:ext cx="1645920" cy="731520"/>
+            <a:ext cx="1783080" cy="731520"/>
           </a:xfrm>
           <a:prstGeom prst="rect">
             <a:avLst/>
@@ -25153,13 +25965,41 @@
             <a:r>
               <a:rPr lang="en-US" sz="1400" dirty="0">
                 <a:solidFill>
-                  <a:srgbClr val="1A1A1A"/>
-                </a:solidFill>
-                <a:latin typeface="Inter" pitchFamily="34" charset="0"/>
-                <a:ea typeface="Inter" pitchFamily="34" charset="-122"/>
-                <a:cs typeface="Inter" pitchFamily="34" charset="-120"/>
-              </a:rPr>
-              <a:t>$204 → $234</a:t>
+                  <a:srgbClr val="595959"/>
+                </a:solidFill>
+                <a:latin typeface="Inter" pitchFamily="34" charset="0"/>
+                <a:ea typeface="Inter" pitchFamily="34" charset="-122"/>
+                <a:cs typeface="Inter" pitchFamily="34" charset="-120"/>
+              </a:rPr>
+              <a:t>$204  </a:t>
+            </a:r>
+            <a:pPr indent="0" marL="0">
+              <a:buNone/>
+            </a:pPr>
+            <a:r>
+              <a:rPr lang="en-US" sz="1400" b="1" dirty="0">
+                <a:solidFill>
+                  <a:srgbClr val="0B7A4A"/>
+                </a:solidFill>
+                <a:latin typeface="Inter" pitchFamily="34" charset="0"/>
+                <a:ea typeface="Inter" pitchFamily="34" charset="-122"/>
+                <a:cs typeface="Inter" pitchFamily="34" charset="-120"/>
+              </a:rPr>
+              <a:t>→  </a:t>
+            </a:r>
+            <a:pPr indent="0" marL="0">
+              <a:buNone/>
+            </a:pPr>
+            <a:r>
+              <a:rPr lang="en-US" sz="1400" b="1" dirty="0">
+                <a:solidFill>
+                  <a:srgbClr val="0B7A4A"/>
+                </a:solidFill>
+                <a:latin typeface="Inter" pitchFamily="34" charset="0"/>
+                <a:ea typeface="Inter" pitchFamily="34" charset="-122"/>
+                <a:cs typeface="Inter" pitchFamily="34" charset="-120"/>
+              </a:rPr>
+              <a:t>$234</a:t>
             </a:r>
             <a:endParaRPr lang="en-US" sz="1400" dirty="0"/>
           </a:p>
@@ -25403,7 +26243,7 @@
                 <a:ea typeface="Inter" pitchFamily="34" charset="-122"/>
                 <a:cs typeface="Inter" pitchFamily="34" charset="-120"/>
               </a:rPr>
-              <a:t>THE CP ENGINE · WHO'S MOVING NOW</a:t>
+              <a:t>CUSTOMER PAY · WHO'S MOVING NOW</a:t>
             </a:r>
             <a:endParaRPr lang="en-US" sz="1400" dirty="0"/>
           </a:p>
@@ -25770,7 +26610,7 @@
         <p:spPr>
           <a:xfrm>
             <a:off x="3657600" y="1993392"/>
-            <a:ext cx="1645920" cy="731520"/>
+            <a:ext cx="1783080" cy="731520"/>
           </a:xfrm>
           <a:prstGeom prst="rect">
             <a:avLst/>
@@ -25788,13 +26628,41 @@
             <a:r>
               <a:rPr lang="en-US" sz="1400" dirty="0">
                 <a:solidFill>
-                  <a:srgbClr val="1A1A1A"/>
-                </a:solidFill>
-                <a:latin typeface="Inter" pitchFamily="34" charset="0"/>
-                <a:ea typeface="Inter" pitchFamily="34" charset="-122"/>
-                <a:cs typeface="Inter" pitchFamily="34" charset="-120"/>
-              </a:rPr>
-              <a:t>39.4% → 46.6%</a:t>
+                  <a:srgbClr val="595959"/>
+                </a:solidFill>
+                <a:latin typeface="Inter" pitchFamily="34" charset="0"/>
+                <a:ea typeface="Inter" pitchFamily="34" charset="-122"/>
+                <a:cs typeface="Inter" pitchFamily="34" charset="-120"/>
+              </a:rPr>
+              <a:t>39.4%  </a:t>
+            </a:r>
+            <a:pPr indent="0" marL="0">
+              <a:buNone/>
+            </a:pPr>
+            <a:r>
+              <a:rPr lang="en-US" sz="1400" b="1" dirty="0">
+                <a:solidFill>
+                  <a:srgbClr val="0B7A4A"/>
+                </a:solidFill>
+                <a:latin typeface="Inter" pitchFamily="34" charset="0"/>
+                <a:ea typeface="Inter" pitchFamily="34" charset="-122"/>
+                <a:cs typeface="Inter" pitchFamily="34" charset="-120"/>
+              </a:rPr>
+              <a:t>→  </a:t>
+            </a:r>
+            <a:pPr indent="0" marL="0">
+              <a:buNone/>
+            </a:pPr>
+            <a:r>
+              <a:rPr lang="en-US" sz="1400" b="1" dirty="0">
+                <a:solidFill>
+                  <a:srgbClr val="0B7A4A"/>
+                </a:solidFill>
+                <a:latin typeface="Inter" pitchFamily="34" charset="0"/>
+                <a:ea typeface="Inter" pitchFamily="34" charset="-122"/>
+                <a:cs typeface="Inter" pitchFamily="34" charset="-120"/>
+              </a:rPr>
+              <a:t>46.6%</a:t>
             </a:r>
             <a:endParaRPr lang="en-US" sz="1400" dirty="0"/>
           </a:p>
@@ -25981,7 +26849,7 @@
         <p:spPr>
           <a:xfrm>
             <a:off x="3657600" y="2724912"/>
-            <a:ext cx="1645920" cy="731520"/>
+            <a:ext cx="1783080" cy="731520"/>
           </a:xfrm>
           <a:prstGeom prst="rect">
             <a:avLst/>
@@ -25999,13 +26867,41 @@
             <a:r>
               <a:rPr lang="en-US" sz="1400" dirty="0">
                 <a:solidFill>
-                  <a:srgbClr val="1A1A1A"/>
-                </a:solidFill>
-                <a:latin typeface="Inter" pitchFamily="34" charset="0"/>
-                <a:ea typeface="Inter" pitchFamily="34" charset="-122"/>
-                <a:cs typeface="Inter" pitchFamily="34" charset="-120"/>
-              </a:rPr>
-              <a:t>39.1% → 43.8%</a:t>
+                  <a:srgbClr val="595959"/>
+                </a:solidFill>
+                <a:latin typeface="Inter" pitchFamily="34" charset="0"/>
+                <a:ea typeface="Inter" pitchFamily="34" charset="-122"/>
+                <a:cs typeface="Inter" pitchFamily="34" charset="-120"/>
+              </a:rPr>
+              <a:t>39.1%  </a:t>
+            </a:r>
+            <a:pPr indent="0" marL="0">
+              <a:buNone/>
+            </a:pPr>
+            <a:r>
+              <a:rPr lang="en-US" sz="1400" b="1" dirty="0">
+                <a:solidFill>
+                  <a:srgbClr val="0B7A4A"/>
+                </a:solidFill>
+                <a:latin typeface="Inter" pitchFamily="34" charset="0"/>
+                <a:ea typeface="Inter" pitchFamily="34" charset="-122"/>
+                <a:cs typeface="Inter" pitchFamily="34" charset="-120"/>
+              </a:rPr>
+              <a:t>→  </a:t>
+            </a:r>
+            <a:pPr indent="0" marL="0">
+              <a:buNone/>
+            </a:pPr>
+            <a:r>
+              <a:rPr lang="en-US" sz="1400" b="1" dirty="0">
+                <a:solidFill>
+                  <a:srgbClr val="0B7A4A"/>
+                </a:solidFill>
+                <a:latin typeface="Inter" pitchFamily="34" charset="0"/>
+                <a:ea typeface="Inter" pitchFamily="34" charset="-122"/>
+                <a:cs typeface="Inter" pitchFamily="34" charset="-120"/>
+              </a:rPr>
+              <a:t>43.8%</a:t>
             </a:r>
             <a:endParaRPr lang="en-US" sz="1400" dirty="0"/>
           </a:p>
@@ -26212,7 +27108,7 @@
         <p:spPr>
           <a:xfrm>
             <a:off x="3657600" y="3456432"/>
-            <a:ext cx="1645920" cy="731520"/>
+            <a:ext cx="1783080" cy="731520"/>
           </a:xfrm>
           <a:prstGeom prst="rect">
             <a:avLst/>
@@ -26230,13 +27126,41 @@
             <a:r>
               <a:rPr lang="en-US" sz="1400" dirty="0">
                 <a:solidFill>
-                  <a:srgbClr val="1A1A1A"/>
-                </a:solidFill>
-                <a:latin typeface="Inter" pitchFamily="34" charset="0"/>
-                <a:ea typeface="Inter" pitchFamily="34" charset="-122"/>
-                <a:cs typeface="Inter" pitchFamily="34" charset="-120"/>
-              </a:rPr>
-              <a:t>35.3% → 39.2%</a:t>
+                  <a:srgbClr val="595959"/>
+                </a:solidFill>
+                <a:latin typeface="Inter" pitchFamily="34" charset="0"/>
+                <a:ea typeface="Inter" pitchFamily="34" charset="-122"/>
+                <a:cs typeface="Inter" pitchFamily="34" charset="-120"/>
+              </a:rPr>
+              <a:t>35.3%  </a:t>
+            </a:r>
+            <a:pPr indent="0" marL="0">
+              <a:buNone/>
+            </a:pPr>
+            <a:r>
+              <a:rPr lang="en-US" sz="1400" b="1" dirty="0">
+                <a:solidFill>
+                  <a:srgbClr val="0B7A4A"/>
+                </a:solidFill>
+                <a:latin typeface="Inter" pitchFamily="34" charset="0"/>
+                <a:ea typeface="Inter" pitchFamily="34" charset="-122"/>
+                <a:cs typeface="Inter" pitchFamily="34" charset="-120"/>
+              </a:rPr>
+              <a:t>→  </a:t>
+            </a:r>
+            <a:pPr indent="0" marL="0">
+              <a:buNone/>
+            </a:pPr>
+            <a:r>
+              <a:rPr lang="en-US" sz="1400" b="1" dirty="0">
+                <a:solidFill>
+                  <a:srgbClr val="0B7A4A"/>
+                </a:solidFill>
+                <a:latin typeface="Inter" pitchFamily="34" charset="0"/>
+                <a:ea typeface="Inter" pitchFamily="34" charset="-122"/>
+                <a:cs typeface="Inter" pitchFamily="34" charset="-120"/>
+              </a:rPr>
+              <a:t>39.2%</a:t>
             </a:r>
             <a:endParaRPr lang="en-US" sz="1400" dirty="0"/>
           </a:p>
@@ -26423,7 +27347,7 @@
         <p:spPr>
           <a:xfrm>
             <a:off x="3657600" y="4187952"/>
-            <a:ext cx="1645920" cy="731520"/>
+            <a:ext cx="1783080" cy="731520"/>
           </a:xfrm>
           <a:prstGeom prst="rect">
             <a:avLst/>
@@ -26441,13 +27365,41 @@
             <a:r>
               <a:rPr lang="en-US" sz="1400" dirty="0">
                 <a:solidFill>
-                  <a:srgbClr val="1A1A1A"/>
-                </a:solidFill>
-                <a:latin typeface="Inter" pitchFamily="34" charset="0"/>
-                <a:ea typeface="Inter" pitchFamily="34" charset="-122"/>
-                <a:cs typeface="Inter" pitchFamily="34" charset="-120"/>
-              </a:rPr>
-              <a:t>41.1% → 44.0%</a:t>
+                  <a:srgbClr val="595959"/>
+                </a:solidFill>
+                <a:latin typeface="Inter" pitchFamily="34" charset="0"/>
+                <a:ea typeface="Inter" pitchFamily="34" charset="-122"/>
+                <a:cs typeface="Inter" pitchFamily="34" charset="-120"/>
+              </a:rPr>
+              <a:t>41.1%  </a:t>
+            </a:r>
+            <a:pPr indent="0" marL="0">
+              <a:buNone/>
+            </a:pPr>
+            <a:r>
+              <a:rPr lang="en-US" sz="1400" b="1" dirty="0">
+                <a:solidFill>
+                  <a:srgbClr val="0B7A4A"/>
+                </a:solidFill>
+                <a:latin typeface="Inter" pitchFamily="34" charset="0"/>
+                <a:ea typeface="Inter" pitchFamily="34" charset="-122"/>
+                <a:cs typeface="Inter" pitchFamily="34" charset="-120"/>
+              </a:rPr>
+              <a:t>→  </a:t>
+            </a:r>
+            <a:pPr indent="0" marL="0">
+              <a:buNone/>
+            </a:pPr>
+            <a:r>
+              <a:rPr lang="en-US" sz="1400" b="1" dirty="0">
+                <a:solidFill>
+                  <a:srgbClr val="0B7A4A"/>
+                </a:solidFill>
+                <a:latin typeface="Inter" pitchFamily="34" charset="0"/>
+                <a:ea typeface="Inter" pitchFamily="34" charset="-122"/>
+                <a:cs typeface="Inter" pitchFamily="34" charset="-120"/>
+              </a:rPr>
+              <a:t>44.0%</a:t>
             </a:r>
             <a:endParaRPr lang="en-US" sz="1400" dirty="0"/>
           </a:p>
@@ -26654,7 +27606,7 @@
         <p:spPr>
           <a:xfrm>
             <a:off x="3657600" y="4919472"/>
-            <a:ext cx="1645920" cy="731520"/>
+            <a:ext cx="1783080" cy="731520"/>
           </a:xfrm>
           <a:prstGeom prst="rect">
             <a:avLst/>
@@ -26672,13 +27624,41 @@
             <a:r>
               <a:rPr lang="en-US" sz="1400" dirty="0">
                 <a:solidFill>
-                  <a:srgbClr val="1A1A1A"/>
-                </a:solidFill>
-                <a:latin typeface="Inter" pitchFamily="34" charset="0"/>
-                <a:ea typeface="Inter" pitchFamily="34" charset="-122"/>
-                <a:cs typeface="Inter" pitchFamily="34" charset="-120"/>
-              </a:rPr>
-              <a:t>39.4% → 41.7%</a:t>
+                  <a:srgbClr val="595959"/>
+                </a:solidFill>
+                <a:latin typeface="Inter" pitchFamily="34" charset="0"/>
+                <a:ea typeface="Inter" pitchFamily="34" charset="-122"/>
+                <a:cs typeface="Inter" pitchFamily="34" charset="-120"/>
+              </a:rPr>
+              <a:t>39.4%  </a:t>
+            </a:r>
+            <a:pPr indent="0" marL="0">
+              <a:buNone/>
+            </a:pPr>
+            <a:r>
+              <a:rPr lang="en-US" sz="1400" b="1" dirty="0">
+                <a:solidFill>
+                  <a:srgbClr val="0B7A4A"/>
+                </a:solidFill>
+                <a:latin typeface="Inter" pitchFamily="34" charset="0"/>
+                <a:ea typeface="Inter" pitchFamily="34" charset="-122"/>
+                <a:cs typeface="Inter" pitchFamily="34" charset="-120"/>
+              </a:rPr>
+              <a:t>→  </a:t>
+            </a:r>
+            <a:pPr indent="0" marL="0">
+              <a:buNone/>
+            </a:pPr>
+            <a:r>
+              <a:rPr lang="en-US" sz="1400" b="1" dirty="0">
+                <a:solidFill>
+                  <a:srgbClr val="0B7A4A"/>
+                </a:solidFill>
+                <a:latin typeface="Inter" pitchFamily="34" charset="0"/>
+                <a:ea typeface="Inter" pitchFamily="34" charset="-122"/>
+                <a:cs typeface="Inter" pitchFamily="34" charset="-120"/>
+              </a:rPr>
+              <a:t>41.7%</a:t>
             </a:r>
             <a:endParaRPr lang="en-US" sz="1400" dirty="0"/>
           </a:p>
@@ -27289,7 +28269,7 @@
         <p:spPr>
           <a:xfrm>
             <a:off x="3657600" y="1993392"/>
-            <a:ext cx="1645920" cy="731520"/>
+            <a:ext cx="1783080" cy="731520"/>
           </a:xfrm>
           <a:prstGeom prst="rect">
             <a:avLst/>
@@ -27307,13 +28287,41 @@
             <a:r>
               <a:rPr lang="en-US" sz="1400" dirty="0">
                 <a:solidFill>
-                  <a:srgbClr val="1A1A1A"/>
-                </a:solidFill>
-                <a:latin typeface="Inter" pitchFamily="34" charset="0"/>
-                <a:ea typeface="Inter" pitchFamily="34" charset="-122"/>
-                <a:cs typeface="Inter" pitchFamily="34" charset="-120"/>
-              </a:rPr>
-              <a:t>21.1% → 31.7%</a:t>
+                  <a:srgbClr val="595959"/>
+                </a:solidFill>
+                <a:latin typeface="Inter" pitchFamily="34" charset="0"/>
+                <a:ea typeface="Inter" pitchFamily="34" charset="-122"/>
+                <a:cs typeface="Inter" pitchFamily="34" charset="-120"/>
+              </a:rPr>
+              <a:t>21.1%  </a:t>
+            </a:r>
+            <a:pPr indent="0" marL="0">
+              <a:buNone/>
+            </a:pPr>
+            <a:r>
+              <a:rPr lang="en-US" sz="1400" b="1" dirty="0">
+                <a:solidFill>
+                  <a:srgbClr val="0B7A4A"/>
+                </a:solidFill>
+                <a:latin typeface="Inter" pitchFamily="34" charset="0"/>
+                <a:ea typeface="Inter" pitchFamily="34" charset="-122"/>
+                <a:cs typeface="Inter" pitchFamily="34" charset="-120"/>
+              </a:rPr>
+              <a:t>→  </a:t>
+            </a:r>
+            <a:pPr indent="0" marL="0">
+              <a:buNone/>
+            </a:pPr>
+            <a:r>
+              <a:rPr lang="en-US" sz="1400" b="1" dirty="0">
+                <a:solidFill>
+                  <a:srgbClr val="0B7A4A"/>
+                </a:solidFill>
+                <a:latin typeface="Inter" pitchFamily="34" charset="0"/>
+                <a:ea typeface="Inter" pitchFamily="34" charset="-122"/>
+                <a:cs typeface="Inter" pitchFamily="34" charset="-120"/>
+              </a:rPr>
+              <a:t>31.7%</a:t>
             </a:r>
             <a:endParaRPr lang="en-US" sz="1400" dirty="0"/>
           </a:p>
@@ -27500,7 +28508,7 @@
         <p:spPr>
           <a:xfrm>
             <a:off x="3657600" y="2724912"/>
-            <a:ext cx="1645920" cy="731520"/>
+            <a:ext cx="1783080" cy="731520"/>
           </a:xfrm>
           <a:prstGeom prst="rect">
             <a:avLst/>
@@ -27518,13 +28526,41 @@
             <a:r>
               <a:rPr lang="en-US" sz="1400" dirty="0">
                 <a:solidFill>
-                  <a:srgbClr val="1A1A1A"/>
-                </a:solidFill>
-                <a:latin typeface="Inter" pitchFamily="34" charset="0"/>
-                <a:ea typeface="Inter" pitchFamily="34" charset="-122"/>
-                <a:cs typeface="Inter" pitchFamily="34" charset="-120"/>
-              </a:rPr>
-              <a:t>12.6% → 22.8%</a:t>
+                  <a:srgbClr val="595959"/>
+                </a:solidFill>
+                <a:latin typeface="Inter" pitchFamily="34" charset="0"/>
+                <a:ea typeface="Inter" pitchFamily="34" charset="-122"/>
+                <a:cs typeface="Inter" pitchFamily="34" charset="-120"/>
+              </a:rPr>
+              <a:t>12.6%  </a:t>
+            </a:r>
+            <a:pPr indent="0" marL="0">
+              <a:buNone/>
+            </a:pPr>
+            <a:r>
+              <a:rPr lang="en-US" sz="1400" b="1" dirty="0">
+                <a:solidFill>
+                  <a:srgbClr val="0B7A4A"/>
+                </a:solidFill>
+                <a:latin typeface="Inter" pitchFamily="34" charset="0"/>
+                <a:ea typeface="Inter" pitchFamily="34" charset="-122"/>
+                <a:cs typeface="Inter" pitchFamily="34" charset="-120"/>
+              </a:rPr>
+              <a:t>→  </a:t>
+            </a:r>
+            <a:pPr indent="0" marL="0">
+              <a:buNone/>
+            </a:pPr>
+            <a:r>
+              <a:rPr lang="en-US" sz="1400" b="1" dirty="0">
+                <a:solidFill>
+                  <a:srgbClr val="0B7A4A"/>
+                </a:solidFill>
+                <a:latin typeface="Inter" pitchFamily="34" charset="0"/>
+                <a:ea typeface="Inter" pitchFamily="34" charset="-122"/>
+                <a:cs typeface="Inter" pitchFamily="34" charset="-120"/>
+              </a:rPr>
+              <a:t>22.8%</a:t>
             </a:r>
             <a:endParaRPr lang="en-US" sz="1400" dirty="0"/>
           </a:p>
@@ -27731,7 +28767,7 @@
         <p:spPr>
           <a:xfrm>
             <a:off x="3657600" y="3456432"/>
-            <a:ext cx="1645920" cy="731520"/>
+            <a:ext cx="1783080" cy="731520"/>
           </a:xfrm>
           <a:prstGeom prst="rect">
             <a:avLst/>
@@ -27749,13 +28785,41 @@
             <a:r>
               <a:rPr lang="en-US" sz="1400" dirty="0">
                 <a:solidFill>
-                  <a:srgbClr val="1A1A1A"/>
-                </a:solidFill>
-                <a:latin typeface="Inter" pitchFamily="34" charset="0"/>
-                <a:ea typeface="Inter" pitchFamily="34" charset="-122"/>
-                <a:cs typeface="Inter" pitchFamily="34" charset="-120"/>
-              </a:rPr>
-              <a:t>4.1% → 11.8%</a:t>
+                  <a:srgbClr val="595959"/>
+                </a:solidFill>
+                <a:latin typeface="Inter" pitchFamily="34" charset="0"/>
+                <a:ea typeface="Inter" pitchFamily="34" charset="-122"/>
+                <a:cs typeface="Inter" pitchFamily="34" charset="-120"/>
+              </a:rPr>
+              <a:t>4.1%  </a:t>
+            </a:r>
+            <a:pPr indent="0" marL="0">
+              <a:buNone/>
+            </a:pPr>
+            <a:r>
+              <a:rPr lang="en-US" sz="1400" b="1" dirty="0">
+                <a:solidFill>
+                  <a:srgbClr val="0B7A4A"/>
+                </a:solidFill>
+                <a:latin typeface="Inter" pitchFamily="34" charset="0"/>
+                <a:ea typeface="Inter" pitchFamily="34" charset="-122"/>
+                <a:cs typeface="Inter" pitchFamily="34" charset="-120"/>
+              </a:rPr>
+              <a:t>→  </a:t>
+            </a:r>
+            <a:pPr indent="0" marL="0">
+              <a:buNone/>
+            </a:pPr>
+            <a:r>
+              <a:rPr lang="en-US" sz="1400" b="1" dirty="0">
+                <a:solidFill>
+                  <a:srgbClr val="0B7A4A"/>
+                </a:solidFill>
+                <a:latin typeface="Inter" pitchFamily="34" charset="0"/>
+                <a:ea typeface="Inter" pitchFamily="34" charset="-122"/>
+                <a:cs typeface="Inter" pitchFamily="34" charset="-120"/>
+              </a:rPr>
+              <a:t>11.8%</a:t>
             </a:r>
             <a:endParaRPr lang="en-US" sz="1400" dirty="0"/>
           </a:p>
@@ -27942,7 +29006,7 @@
         <p:spPr>
           <a:xfrm>
             <a:off x="3657600" y="4187952"/>
-            <a:ext cx="1645920" cy="731520"/>
+            <a:ext cx="1783080" cy="731520"/>
           </a:xfrm>
           <a:prstGeom prst="rect">
             <a:avLst/>
@@ -27960,13 +29024,41 @@
             <a:r>
               <a:rPr lang="en-US" sz="1400" dirty="0">
                 <a:solidFill>
-                  <a:srgbClr val="1A1A1A"/>
-                </a:solidFill>
-                <a:latin typeface="Inter" pitchFamily="34" charset="0"/>
-                <a:ea typeface="Inter" pitchFamily="34" charset="-122"/>
-                <a:cs typeface="Inter" pitchFamily="34" charset="-120"/>
-              </a:rPr>
-              <a:t>18.3% → 25.7%</a:t>
+                  <a:srgbClr val="595959"/>
+                </a:solidFill>
+                <a:latin typeface="Inter" pitchFamily="34" charset="0"/>
+                <a:ea typeface="Inter" pitchFamily="34" charset="-122"/>
+                <a:cs typeface="Inter" pitchFamily="34" charset="-120"/>
+              </a:rPr>
+              <a:t>18.3%  </a:t>
+            </a:r>
+            <a:pPr indent="0" marL="0">
+              <a:buNone/>
+            </a:pPr>
+            <a:r>
+              <a:rPr lang="en-US" sz="1400" b="1" dirty="0">
+                <a:solidFill>
+                  <a:srgbClr val="0B7A4A"/>
+                </a:solidFill>
+                <a:latin typeface="Inter" pitchFamily="34" charset="0"/>
+                <a:ea typeface="Inter" pitchFamily="34" charset="-122"/>
+                <a:cs typeface="Inter" pitchFamily="34" charset="-120"/>
+              </a:rPr>
+              <a:t>→  </a:t>
+            </a:r>
+            <a:pPr indent="0" marL="0">
+              <a:buNone/>
+            </a:pPr>
+            <a:r>
+              <a:rPr lang="en-US" sz="1400" b="1" dirty="0">
+                <a:solidFill>
+                  <a:srgbClr val="0B7A4A"/>
+                </a:solidFill>
+                <a:latin typeface="Inter" pitchFamily="34" charset="0"/>
+                <a:ea typeface="Inter" pitchFamily="34" charset="-122"/>
+                <a:cs typeface="Inter" pitchFamily="34" charset="-120"/>
+              </a:rPr>
+              <a:t>25.7%</a:t>
             </a:r>
             <a:endParaRPr lang="en-US" sz="1400" dirty="0"/>
           </a:p>
@@ -28173,7 +29265,7 @@
         <p:spPr>
           <a:xfrm>
             <a:off x="3657600" y="4919472"/>
-            <a:ext cx="1645920" cy="731520"/>
+            <a:ext cx="1783080" cy="731520"/>
           </a:xfrm>
           <a:prstGeom prst="rect">
             <a:avLst/>
@@ -28191,13 +29283,41 @@
             <a:r>
               <a:rPr lang="en-US" sz="1400" dirty="0">
                 <a:solidFill>
-                  <a:srgbClr val="1A1A1A"/>
-                </a:solidFill>
-                <a:latin typeface="Inter" pitchFamily="34" charset="0"/>
-                <a:ea typeface="Inter" pitchFamily="34" charset="-122"/>
-                <a:cs typeface="Inter" pitchFamily="34" charset="-120"/>
-              </a:rPr>
-              <a:t>12.8% → 19.4%</a:t>
+                  <a:srgbClr val="595959"/>
+                </a:solidFill>
+                <a:latin typeface="Inter" pitchFamily="34" charset="0"/>
+                <a:ea typeface="Inter" pitchFamily="34" charset="-122"/>
+                <a:cs typeface="Inter" pitchFamily="34" charset="-120"/>
+              </a:rPr>
+              <a:t>12.8%  </a:t>
+            </a:r>
+            <a:pPr indent="0" marL="0">
+              <a:buNone/>
+            </a:pPr>
+            <a:r>
+              <a:rPr lang="en-US" sz="1400" b="1" dirty="0">
+                <a:solidFill>
+                  <a:srgbClr val="0B7A4A"/>
+                </a:solidFill>
+                <a:latin typeface="Inter" pitchFamily="34" charset="0"/>
+                <a:ea typeface="Inter" pitchFamily="34" charset="-122"/>
+                <a:cs typeface="Inter" pitchFamily="34" charset="-120"/>
+              </a:rPr>
+              <a:t>→  </a:t>
+            </a:r>
+            <a:pPr indent="0" marL="0">
+              <a:buNone/>
+            </a:pPr>
+            <a:r>
+              <a:rPr lang="en-US" sz="1400" b="1" dirty="0">
+                <a:solidFill>
+                  <a:srgbClr val="0B7A4A"/>
+                </a:solidFill>
+                <a:latin typeface="Inter" pitchFamily="34" charset="0"/>
+                <a:ea typeface="Inter" pitchFamily="34" charset="-122"/>
+                <a:cs typeface="Inter" pitchFamily="34" charset="-120"/>
+              </a:rPr>
+              <a:t>19.4%</a:t>
             </a:r>
             <a:endParaRPr lang="en-US" sz="1400" dirty="0"/>
           </a:p>
@@ -28808,7 +29928,7 @@
         <p:spPr>
           <a:xfrm>
             <a:off x="3657600" y="1993392"/>
-            <a:ext cx="1645920" cy="731520"/>
+            <a:ext cx="1783080" cy="731520"/>
           </a:xfrm>
           <a:prstGeom prst="rect">
             <a:avLst/>
@@ -28826,13 +29946,41 @@
             <a:r>
               <a:rPr lang="en-US" sz="1400" dirty="0">
                 <a:solidFill>
-                  <a:srgbClr val="1A1A1A"/>
-                </a:solidFill>
-                <a:latin typeface="Inter" pitchFamily="34" charset="0"/>
-                <a:ea typeface="Inter" pitchFamily="34" charset="-122"/>
-                <a:cs typeface="Inter" pitchFamily="34" charset="-120"/>
-              </a:rPr>
-              <a:t>10.1% → 19.3%</a:t>
+                  <a:srgbClr val="595959"/>
+                </a:solidFill>
+                <a:latin typeface="Inter" pitchFamily="34" charset="0"/>
+                <a:ea typeface="Inter" pitchFamily="34" charset="-122"/>
+                <a:cs typeface="Inter" pitchFamily="34" charset="-120"/>
+              </a:rPr>
+              <a:t>10.1%  </a:t>
+            </a:r>
+            <a:pPr indent="0" marL="0">
+              <a:buNone/>
+            </a:pPr>
+            <a:r>
+              <a:rPr lang="en-US" sz="1400" b="1" dirty="0">
+                <a:solidFill>
+                  <a:srgbClr val="0B7A4A"/>
+                </a:solidFill>
+                <a:latin typeface="Inter" pitchFamily="34" charset="0"/>
+                <a:ea typeface="Inter" pitchFamily="34" charset="-122"/>
+                <a:cs typeface="Inter" pitchFamily="34" charset="-120"/>
+              </a:rPr>
+              <a:t>→  </a:t>
+            </a:r>
+            <a:pPr indent="0" marL="0">
+              <a:buNone/>
+            </a:pPr>
+            <a:r>
+              <a:rPr lang="en-US" sz="1400" b="1" dirty="0">
+                <a:solidFill>
+                  <a:srgbClr val="0B7A4A"/>
+                </a:solidFill>
+                <a:latin typeface="Inter" pitchFamily="34" charset="0"/>
+                <a:ea typeface="Inter" pitchFamily="34" charset="-122"/>
+                <a:cs typeface="Inter" pitchFamily="34" charset="-120"/>
+              </a:rPr>
+              <a:t>19.3%</a:t>
             </a:r>
             <a:endParaRPr lang="en-US" sz="1400" dirty="0"/>
           </a:p>
@@ -29019,7 +30167,7 @@
         <p:spPr>
           <a:xfrm>
             <a:off x="3657600" y="2724912"/>
-            <a:ext cx="1645920" cy="731520"/>
+            <a:ext cx="1783080" cy="731520"/>
           </a:xfrm>
           <a:prstGeom prst="rect">
             <a:avLst/>
@@ -29037,13 +30185,41 @@
             <a:r>
               <a:rPr lang="en-US" sz="1400" dirty="0">
                 <a:solidFill>
-                  <a:srgbClr val="1A1A1A"/>
-                </a:solidFill>
-                <a:latin typeface="Inter" pitchFamily="34" charset="0"/>
-                <a:ea typeface="Inter" pitchFamily="34" charset="-122"/>
-                <a:cs typeface="Inter" pitchFamily="34" charset="-120"/>
-              </a:rPr>
-              <a:t>10.8% → 16.1%</a:t>
+                  <a:srgbClr val="595959"/>
+                </a:solidFill>
+                <a:latin typeface="Inter" pitchFamily="34" charset="0"/>
+                <a:ea typeface="Inter" pitchFamily="34" charset="-122"/>
+                <a:cs typeface="Inter" pitchFamily="34" charset="-120"/>
+              </a:rPr>
+              <a:t>10.8%  </a:t>
+            </a:r>
+            <a:pPr indent="0" marL="0">
+              <a:buNone/>
+            </a:pPr>
+            <a:r>
+              <a:rPr lang="en-US" sz="1400" b="1" dirty="0">
+                <a:solidFill>
+                  <a:srgbClr val="0B7A4A"/>
+                </a:solidFill>
+                <a:latin typeface="Inter" pitchFamily="34" charset="0"/>
+                <a:ea typeface="Inter" pitchFamily="34" charset="-122"/>
+                <a:cs typeface="Inter" pitchFamily="34" charset="-120"/>
+              </a:rPr>
+              <a:t>→  </a:t>
+            </a:r>
+            <a:pPr indent="0" marL="0">
+              <a:buNone/>
+            </a:pPr>
+            <a:r>
+              <a:rPr lang="en-US" sz="1400" b="1" dirty="0">
+                <a:solidFill>
+                  <a:srgbClr val="0B7A4A"/>
+                </a:solidFill>
+                <a:latin typeface="Inter" pitchFamily="34" charset="0"/>
+                <a:ea typeface="Inter" pitchFamily="34" charset="-122"/>
+                <a:cs typeface="Inter" pitchFamily="34" charset="-120"/>
+              </a:rPr>
+              <a:t>16.1%</a:t>
             </a:r>
             <a:endParaRPr lang="en-US" sz="1400" dirty="0"/>
           </a:p>
@@ -29250,7 +30426,7 @@
         <p:spPr>
           <a:xfrm>
             <a:off x="3657600" y="3456432"/>
-            <a:ext cx="1645920" cy="731520"/>
+            <a:ext cx="1783080" cy="731520"/>
           </a:xfrm>
           <a:prstGeom prst="rect">
             <a:avLst/>
@@ -29268,13 +30444,41 @@
             <a:r>
               <a:rPr lang="en-US" sz="1400" dirty="0">
                 <a:solidFill>
-                  <a:srgbClr val="1A1A1A"/>
-                </a:solidFill>
-                <a:latin typeface="Inter" pitchFamily="34" charset="0"/>
-                <a:ea typeface="Inter" pitchFamily="34" charset="-122"/>
-                <a:cs typeface="Inter" pitchFamily="34" charset="-120"/>
-              </a:rPr>
-              <a:t>0.7% → 4.0%</a:t>
+                  <a:srgbClr val="595959"/>
+                </a:solidFill>
+                <a:latin typeface="Inter" pitchFamily="34" charset="0"/>
+                <a:ea typeface="Inter" pitchFamily="34" charset="-122"/>
+                <a:cs typeface="Inter" pitchFamily="34" charset="-120"/>
+              </a:rPr>
+              <a:t>0.7%  </a:t>
+            </a:r>
+            <a:pPr indent="0" marL="0">
+              <a:buNone/>
+            </a:pPr>
+            <a:r>
+              <a:rPr lang="en-US" sz="1400" b="1" dirty="0">
+                <a:solidFill>
+                  <a:srgbClr val="0B7A4A"/>
+                </a:solidFill>
+                <a:latin typeface="Inter" pitchFamily="34" charset="0"/>
+                <a:ea typeface="Inter" pitchFamily="34" charset="-122"/>
+                <a:cs typeface="Inter" pitchFamily="34" charset="-120"/>
+              </a:rPr>
+              <a:t>→  </a:t>
+            </a:r>
+            <a:pPr indent="0" marL="0">
+              <a:buNone/>
+            </a:pPr>
+            <a:r>
+              <a:rPr lang="en-US" sz="1400" b="1" dirty="0">
+                <a:solidFill>
+                  <a:srgbClr val="0B7A4A"/>
+                </a:solidFill>
+                <a:latin typeface="Inter" pitchFamily="34" charset="0"/>
+                <a:ea typeface="Inter" pitchFamily="34" charset="-122"/>
+                <a:cs typeface="Inter" pitchFamily="34" charset="-120"/>
+              </a:rPr>
+              <a:t>4.0%</a:t>
             </a:r>
             <a:endParaRPr lang="en-US" sz="1400" dirty="0"/>
           </a:p>
@@ -29461,7 +30665,7 @@
         <p:spPr>
           <a:xfrm>
             <a:off x="3657600" y="4187952"/>
-            <a:ext cx="1645920" cy="731520"/>
+            <a:ext cx="1783080" cy="731520"/>
           </a:xfrm>
           <a:prstGeom prst="rect">
             <a:avLst/>
@@ -29479,13 +30683,41 @@
             <a:r>
               <a:rPr lang="en-US" sz="1400" dirty="0">
                 <a:solidFill>
-                  <a:srgbClr val="1A1A1A"/>
-                </a:solidFill>
-                <a:latin typeface="Inter" pitchFamily="34" charset="0"/>
-                <a:ea typeface="Inter" pitchFamily="34" charset="-122"/>
-                <a:cs typeface="Inter" pitchFamily="34" charset="-120"/>
-              </a:rPr>
-              <a:t>5.3% → 8.5%</a:t>
+                  <a:srgbClr val="595959"/>
+                </a:solidFill>
+                <a:latin typeface="Inter" pitchFamily="34" charset="0"/>
+                <a:ea typeface="Inter" pitchFamily="34" charset="-122"/>
+                <a:cs typeface="Inter" pitchFamily="34" charset="-120"/>
+              </a:rPr>
+              <a:t>5.3%  </a:t>
+            </a:r>
+            <a:pPr indent="0" marL="0">
+              <a:buNone/>
+            </a:pPr>
+            <a:r>
+              <a:rPr lang="en-US" sz="1400" b="1" dirty="0">
+                <a:solidFill>
+                  <a:srgbClr val="0B7A4A"/>
+                </a:solidFill>
+                <a:latin typeface="Inter" pitchFamily="34" charset="0"/>
+                <a:ea typeface="Inter" pitchFamily="34" charset="-122"/>
+                <a:cs typeface="Inter" pitchFamily="34" charset="-120"/>
+              </a:rPr>
+              <a:t>→  </a:t>
+            </a:r>
+            <a:pPr indent="0" marL="0">
+              <a:buNone/>
+            </a:pPr>
+            <a:r>
+              <a:rPr lang="en-US" sz="1400" b="1" dirty="0">
+                <a:solidFill>
+                  <a:srgbClr val="0B7A4A"/>
+                </a:solidFill>
+                <a:latin typeface="Inter" pitchFamily="34" charset="0"/>
+                <a:ea typeface="Inter" pitchFamily="34" charset="-122"/>
+                <a:cs typeface="Inter" pitchFamily="34" charset="-120"/>
+              </a:rPr>
+              <a:t>8.5%</a:t>
             </a:r>
             <a:endParaRPr lang="en-US" sz="1400" dirty="0"/>
           </a:p>
@@ -29692,7 +30924,7 @@
         <p:spPr>
           <a:xfrm>
             <a:off x="3657600" y="4919472"/>
-            <a:ext cx="1645920" cy="731520"/>
+            <a:ext cx="1783080" cy="731520"/>
           </a:xfrm>
           <a:prstGeom prst="rect">
             <a:avLst/>
@@ -29710,13 +30942,41 @@
             <a:r>
               <a:rPr lang="en-US" sz="1400" dirty="0">
                 <a:solidFill>
-                  <a:srgbClr val="1A1A1A"/>
-                </a:solidFill>
-                <a:latin typeface="Inter" pitchFamily="34" charset="0"/>
-                <a:ea typeface="Inter" pitchFamily="34" charset="-122"/>
-                <a:cs typeface="Inter" pitchFamily="34" charset="-120"/>
-              </a:rPr>
-              <a:t>9.7% → 12.2%</a:t>
+                  <a:srgbClr val="595959"/>
+                </a:solidFill>
+                <a:latin typeface="Inter" pitchFamily="34" charset="0"/>
+                <a:ea typeface="Inter" pitchFamily="34" charset="-122"/>
+                <a:cs typeface="Inter" pitchFamily="34" charset="-120"/>
+              </a:rPr>
+              <a:t>9.7%  </a:t>
+            </a:r>
+            <a:pPr indent="0" marL="0">
+              <a:buNone/>
+            </a:pPr>
+            <a:r>
+              <a:rPr lang="en-US" sz="1400" b="1" dirty="0">
+                <a:solidFill>
+                  <a:srgbClr val="0B7A4A"/>
+                </a:solidFill>
+                <a:latin typeface="Inter" pitchFamily="34" charset="0"/>
+                <a:ea typeface="Inter" pitchFamily="34" charset="-122"/>
+                <a:cs typeface="Inter" pitchFamily="34" charset="-120"/>
+              </a:rPr>
+              <a:t>→  </a:t>
+            </a:r>
+            <a:pPr indent="0" marL="0">
+              <a:buNone/>
+            </a:pPr>
+            <a:r>
+              <a:rPr lang="en-US" sz="1400" b="1" dirty="0">
+                <a:solidFill>
+                  <a:srgbClr val="0B7A4A"/>
+                </a:solidFill>
+                <a:latin typeface="Inter" pitchFamily="34" charset="0"/>
+                <a:ea typeface="Inter" pitchFamily="34" charset="-122"/>
+                <a:cs typeface="Inter" pitchFamily="34" charset="-120"/>
+              </a:rPr>
+              <a:t>12.2%</a:t>
             </a:r>
             <a:endParaRPr lang="en-US" sz="1400" dirty="0"/>
           </a:p>
@@ -30327,7 +31587,7 @@
         <p:spPr>
           <a:xfrm>
             <a:off x="3657600" y="1993392"/>
-            <a:ext cx="1645920" cy="731520"/>
+            <a:ext cx="1783080" cy="731520"/>
           </a:xfrm>
           <a:prstGeom prst="rect">
             <a:avLst/>
@@ -30345,13 +31605,41 @@
             <a:r>
               <a:rPr lang="en-US" sz="1400" dirty="0">
                 <a:solidFill>
-                  <a:srgbClr val="1A1A1A"/>
-                </a:solidFill>
-                <a:latin typeface="Inter" pitchFamily="34" charset="0"/>
-                <a:ea typeface="Inter" pitchFamily="34" charset="-122"/>
-                <a:cs typeface="Inter" pitchFamily="34" charset="-120"/>
-              </a:rPr>
-              <a:t>5.2% → 14.1%</a:t>
+                  <a:srgbClr val="595959"/>
+                </a:solidFill>
+                <a:latin typeface="Inter" pitchFamily="34" charset="0"/>
+                <a:ea typeface="Inter" pitchFamily="34" charset="-122"/>
+                <a:cs typeface="Inter" pitchFamily="34" charset="-120"/>
+              </a:rPr>
+              <a:t>5.2%  </a:t>
+            </a:r>
+            <a:pPr indent="0" marL="0">
+              <a:buNone/>
+            </a:pPr>
+            <a:r>
+              <a:rPr lang="en-US" sz="1400" b="1" dirty="0">
+                <a:solidFill>
+                  <a:srgbClr val="0B7A4A"/>
+                </a:solidFill>
+                <a:latin typeface="Inter" pitchFamily="34" charset="0"/>
+                <a:ea typeface="Inter" pitchFamily="34" charset="-122"/>
+                <a:cs typeface="Inter" pitchFamily="34" charset="-120"/>
+              </a:rPr>
+              <a:t>→  </a:t>
+            </a:r>
+            <a:pPr indent="0" marL="0">
+              <a:buNone/>
+            </a:pPr>
+            <a:r>
+              <a:rPr lang="en-US" sz="1400" b="1" dirty="0">
+                <a:solidFill>
+                  <a:srgbClr val="0B7A4A"/>
+                </a:solidFill>
+                <a:latin typeface="Inter" pitchFamily="34" charset="0"/>
+                <a:ea typeface="Inter" pitchFamily="34" charset="-122"/>
+                <a:cs typeface="Inter" pitchFamily="34" charset="-120"/>
+              </a:rPr>
+              <a:t>14.1%</a:t>
             </a:r>
             <a:endParaRPr lang="en-US" sz="1400" dirty="0"/>
           </a:p>
@@ -30538,7 +31826,7 @@
         <p:spPr>
           <a:xfrm>
             <a:off x="3657600" y="2724912"/>
-            <a:ext cx="1645920" cy="731520"/>
+            <a:ext cx="1783080" cy="731520"/>
           </a:xfrm>
           <a:prstGeom prst="rect">
             <a:avLst/>
@@ -30556,13 +31844,41 @@
             <a:r>
               <a:rPr lang="en-US" sz="1400" dirty="0">
                 <a:solidFill>
-                  <a:srgbClr val="1A1A1A"/>
-                </a:solidFill>
-                <a:latin typeface="Inter" pitchFamily="34" charset="0"/>
-                <a:ea typeface="Inter" pitchFamily="34" charset="-122"/>
-                <a:cs typeface="Inter" pitchFamily="34" charset="-120"/>
-              </a:rPr>
-              <a:t>0.5% → 5.3%</a:t>
+                  <a:srgbClr val="595959"/>
+                </a:solidFill>
+                <a:latin typeface="Inter" pitchFamily="34" charset="0"/>
+                <a:ea typeface="Inter" pitchFamily="34" charset="-122"/>
+                <a:cs typeface="Inter" pitchFamily="34" charset="-120"/>
+              </a:rPr>
+              <a:t>0.5%  </a:t>
+            </a:r>
+            <a:pPr indent="0" marL="0">
+              <a:buNone/>
+            </a:pPr>
+            <a:r>
+              <a:rPr lang="en-US" sz="1400" b="1" dirty="0">
+                <a:solidFill>
+                  <a:srgbClr val="0B7A4A"/>
+                </a:solidFill>
+                <a:latin typeface="Inter" pitchFamily="34" charset="0"/>
+                <a:ea typeface="Inter" pitchFamily="34" charset="-122"/>
+                <a:cs typeface="Inter" pitchFamily="34" charset="-120"/>
+              </a:rPr>
+              <a:t>→  </a:t>
+            </a:r>
+            <a:pPr indent="0" marL="0">
+              <a:buNone/>
+            </a:pPr>
+            <a:r>
+              <a:rPr lang="en-US" sz="1400" b="1" dirty="0">
+                <a:solidFill>
+                  <a:srgbClr val="0B7A4A"/>
+                </a:solidFill>
+                <a:latin typeface="Inter" pitchFamily="34" charset="0"/>
+                <a:ea typeface="Inter" pitchFamily="34" charset="-122"/>
+                <a:cs typeface="Inter" pitchFamily="34" charset="-120"/>
+              </a:rPr>
+              <a:t>5.3%</a:t>
             </a:r>
             <a:endParaRPr lang="en-US" sz="1400" dirty="0"/>
           </a:p>
@@ -30769,7 +32085,7 @@
         <p:spPr>
           <a:xfrm>
             <a:off x="3657600" y="3456432"/>
-            <a:ext cx="1645920" cy="731520"/>
+            <a:ext cx="1783080" cy="731520"/>
           </a:xfrm>
           <a:prstGeom prst="rect">
             <a:avLst/>
@@ -30787,13 +32103,41 @@
             <a:r>
               <a:rPr lang="en-US" sz="1400" dirty="0">
                 <a:solidFill>
-                  <a:srgbClr val="1A1A1A"/>
-                </a:solidFill>
-                <a:latin typeface="Inter" pitchFamily="34" charset="0"/>
-                <a:ea typeface="Inter" pitchFamily="34" charset="-122"/>
-                <a:cs typeface="Inter" pitchFamily="34" charset="-120"/>
-              </a:rPr>
-              <a:t>3.9% → 7.9%</a:t>
+                  <a:srgbClr val="595959"/>
+                </a:solidFill>
+                <a:latin typeface="Inter" pitchFamily="34" charset="0"/>
+                <a:ea typeface="Inter" pitchFamily="34" charset="-122"/>
+                <a:cs typeface="Inter" pitchFamily="34" charset="-120"/>
+              </a:rPr>
+              <a:t>3.9%  </a:t>
+            </a:r>
+            <a:pPr indent="0" marL="0">
+              <a:buNone/>
+            </a:pPr>
+            <a:r>
+              <a:rPr lang="en-US" sz="1400" b="1" dirty="0">
+                <a:solidFill>
+                  <a:srgbClr val="0B7A4A"/>
+                </a:solidFill>
+                <a:latin typeface="Inter" pitchFamily="34" charset="0"/>
+                <a:ea typeface="Inter" pitchFamily="34" charset="-122"/>
+                <a:cs typeface="Inter" pitchFamily="34" charset="-120"/>
+              </a:rPr>
+              <a:t>→  </a:t>
+            </a:r>
+            <a:pPr indent="0" marL="0">
+              <a:buNone/>
+            </a:pPr>
+            <a:r>
+              <a:rPr lang="en-US" sz="1400" b="1" dirty="0">
+                <a:solidFill>
+                  <a:srgbClr val="0B7A4A"/>
+                </a:solidFill>
+                <a:latin typeface="Inter" pitchFamily="34" charset="0"/>
+                <a:ea typeface="Inter" pitchFamily="34" charset="-122"/>
+                <a:cs typeface="Inter" pitchFamily="34" charset="-120"/>
+              </a:rPr>
+              <a:t>7.9%</a:t>
             </a:r>
             <a:endParaRPr lang="en-US" sz="1400" dirty="0"/>
           </a:p>
@@ -30980,7 +32324,7 @@
         <p:spPr>
           <a:xfrm>
             <a:off x="3657600" y="4187952"/>
-            <a:ext cx="1645920" cy="731520"/>
+            <a:ext cx="1783080" cy="731520"/>
           </a:xfrm>
           <a:prstGeom prst="rect">
             <a:avLst/>
@@ -30998,13 +32342,41 @@
             <a:r>
               <a:rPr lang="en-US" sz="1400" dirty="0">
                 <a:solidFill>
-                  <a:srgbClr val="1A1A1A"/>
-                </a:solidFill>
-                <a:latin typeface="Inter" pitchFamily="34" charset="0"/>
-                <a:ea typeface="Inter" pitchFamily="34" charset="-122"/>
-                <a:cs typeface="Inter" pitchFamily="34" charset="-120"/>
-              </a:rPr>
-              <a:t>8.3% → 11.7%</a:t>
+                  <a:srgbClr val="595959"/>
+                </a:solidFill>
+                <a:latin typeface="Inter" pitchFamily="34" charset="0"/>
+                <a:ea typeface="Inter" pitchFamily="34" charset="-122"/>
+                <a:cs typeface="Inter" pitchFamily="34" charset="-120"/>
+              </a:rPr>
+              <a:t>8.3%  </a:t>
+            </a:r>
+            <a:pPr indent="0" marL="0">
+              <a:buNone/>
+            </a:pPr>
+            <a:r>
+              <a:rPr lang="en-US" sz="1400" b="1" dirty="0">
+                <a:solidFill>
+                  <a:srgbClr val="0B7A4A"/>
+                </a:solidFill>
+                <a:latin typeface="Inter" pitchFamily="34" charset="0"/>
+                <a:ea typeface="Inter" pitchFamily="34" charset="-122"/>
+                <a:cs typeface="Inter" pitchFamily="34" charset="-120"/>
+              </a:rPr>
+              <a:t>→  </a:t>
+            </a:r>
+            <a:pPr indent="0" marL="0">
+              <a:buNone/>
+            </a:pPr>
+            <a:r>
+              <a:rPr lang="en-US" sz="1400" b="1" dirty="0">
+                <a:solidFill>
+                  <a:srgbClr val="0B7A4A"/>
+                </a:solidFill>
+                <a:latin typeface="Inter" pitchFamily="34" charset="0"/>
+                <a:ea typeface="Inter" pitchFamily="34" charset="-122"/>
+                <a:cs typeface="Inter" pitchFamily="34" charset="-120"/>
+              </a:rPr>
+              <a:t>11.7%</a:t>
             </a:r>
             <a:endParaRPr lang="en-US" sz="1400" dirty="0"/>
           </a:p>
@@ -31211,7 +32583,7 @@
         <p:spPr>
           <a:xfrm>
             <a:off x="3657600" y="4919472"/>
-            <a:ext cx="1645920" cy="731520"/>
+            <a:ext cx="1783080" cy="731520"/>
           </a:xfrm>
           <a:prstGeom prst="rect">
             <a:avLst/>
@@ -31229,13 +32601,41 @@
             <a:r>
               <a:rPr lang="en-US" sz="1400" dirty="0">
                 <a:solidFill>
-                  <a:srgbClr val="1A1A1A"/>
-                </a:solidFill>
-                <a:latin typeface="Inter" pitchFamily="34" charset="0"/>
-                <a:ea typeface="Inter" pitchFamily="34" charset="-122"/>
-                <a:cs typeface="Inter" pitchFamily="34" charset="-120"/>
-              </a:rPr>
-              <a:t>8.1% → 10.3%</a:t>
+                  <a:srgbClr val="595959"/>
+                </a:solidFill>
+                <a:latin typeface="Inter" pitchFamily="34" charset="0"/>
+                <a:ea typeface="Inter" pitchFamily="34" charset="-122"/>
+                <a:cs typeface="Inter" pitchFamily="34" charset="-120"/>
+              </a:rPr>
+              <a:t>8.1%  </a:t>
+            </a:r>
+            <a:pPr indent="0" marL="0">
+              <a:buNone/>
+            </a:pPr>
+            <a:r>
+              <a:rPr lang="en-US" sz="1400" b="1" dirty="0">
+                <a:solidFill>
+                  <a:srgbClr val="0B7A4A"/>
+                </a:solidFill>
+                <a:latin typeface="Inter" pitchFamily="34" charset="0"/>
+                <a:ea typeface="Inter" pitchFamily="34" charset="-122"/>
+                <a:cs typeface="Inter" pitchFamily="34" charset="-120"/>
+              </a:rPr>
+              <a:t>→  </a:t>
+            </a:r>
+            <a:pPr indent="0" marL="0">
+              <a:buNone/>
+            </a:pPr>
+            <a:r>
+              <a:rPr lang="en-US" sz="1400" b="1" dirty="0">
+                <a:solidFill>
+                  <a:srgbClr val="0B7A4A"/>
+                </a:solidFill>
+                <a:latin typeface="Inter" pitchFamily="34" charset="0"/>
+                <a:ea typeface="Inter" pitchFamily="34" charset="-122"/>
+                <a:cs typeface="Inter" pitchFamily="34" charset="-120"/>
+              </a:rPr>
+              <a:t>10.3%</a:t>
             </a:r>
             <a:endParaRPr lang="en-US" sz="1400" dirty="0"/>
           </a:p>

--- a/day2-deck/decks/Who's Moving Now - Review.pptx
+++ b/day2-deck/decks/Who's Moving Now - Review.pptx
@@ -15061,7 +15061,7 @@
           <a:p>
             <a:r>
               <a:rPr lang="en-US" dirty="0"/>
-              <a:t>Source: Qlik - Closed Repair Orders. Customer pay, by close date. Same-store, 33 stores (INEOS excluded, opened 2026). GMC Prescott body shop labor types excluded. CP gross = CP labor gross + CP parts gross. Change is Jul-Sep 2026 (Q3) vs Jan-Mar 2026 (Q1), each store against itself. Gross and ROs are per-month averages of each quarter. The group's own Q1-to-Q3 change is the seasonal baseline: it is the same for every store, so ranking by a store's change is the same as ranking by how far it beat the group. 'Stepped up in' = the month that best splits the store's year into a lower stretch before and a higher stretch after (at least three months before, two after). It is a conversation starter, not proof of cause.
+              <a:t>Takeaway (off the slide): Mazda went $155K to $209K, stepping up in August. Ask what changed that month.Source: Qlik - Closed Repair Orders. Customer pay, by close date. Same-store, 33 stores (INEOS excluded, opened 2026). GMC Prescott body shop labor types excluded. CP gross = CP labor gross + CP parts gross. Change is Jul-Sep 2026 (Q3) vs Jan-Mar 2026 (Q1), each store against itself. Gross and ROs are per-month averages of each quarter. The group's own Q1-to-Q3 change is the seasonal baseline: it is the same for every store, so ranking by a store's change is the same as ranking by how far it beat the group. 'Stepped up in' = the month that best splits the store's year into a lower stretch before and a higher stretch after (at least three months before, two after). It is a conversation starter, not proof of cause.
 Review note: the month line is the store's own monthly cp gross per month, so a step up shows as the line moving to a higher level and staying there. Volume measures (gross, ROs) still carry some store-specific seasonality (snowbird markets) the group baseline cannot fully remove; the rate measures are the cleanest read.</a:t>
             </a:r>
             <a:endParaRPr lang="en-US" dirty="0"/>
@@ -15150,7 +15150,7 @@
           <a:p>
             <a:r>
               <a:rPr lang="en-US" dirty="0"/>
-              <a:t>Source: Qlik - Closed Repair Orders. Customer pay, by close date. Same-store, 33 stores (INEOS excluded, opened 2026). GMC Prescott body shop labor types excluded. CP gross = CP labor gross + CP parts gross. Change is Jul-Sep 2026 (Q3) vs Jan-Mar 2026 (Q1), each store against itself. Gross and ROs are per-month averages of each quarter. The group's own Q1-to-Q3 change is the seasonal baseline: it is the same for every store, so ranking by a store's change is the same as ranking by how far it beat the group. 'Stepped up in' = the month that best splits the store's year into a lower stretch before and a higher stretch after (at least three months before, two after). It is a conversation starter, not proof of cause. Opcode closing % = ROs with the service ÷ customer-pay ROs on the op-code report basis, same as the Opcode Benchmarks slides.
+              <a:t>Takeaway (off the slide): Mazda went 2.5% to 10.7%, stepping up in August. Ask what changed that month.Source: Qlik - Closed Repair Orders. Customer pay, by close date. Same-store, 33 stores (INEOS excluded, opened 2026). GMC Prescott body shop labor types excluded. CP gross = CP labor gross + CP parts gross. Change is Jul-Sep 2026 (Q3) vs Jan-Mar 2026 (Q1), each store against itself. Gross and ROs are per-month averages of each quarter. The group's own Q1-to-Q3 change is the seasonal baseline: it is the same for every store, so ranking by a store's change is the same as ranking by how far it beat the group. 'Stepped up in' = the month that best splits the store's year into a lower stretch before and a higher stretch after (at least three months before, two after). It is a conversation starter, not proof of cause. Opcode closing % = ROs with the service ÷ customer-pay ROs on the op-code report basis, same as the Opcode Benchmarks slides.
 Review note: the month line is the store's own monthly fuel service %, so a step up shows as the line moving to a higher level and staying there. Volume measures (gross, ROs) still carry some store-specific seasonality (snowbird markets) the group baseline cannot fully remove; the rate measures are the cleanest read.</a:t>
             </a:r>
             <a:endParaRPr lang="en-US" dirty="0"/>
@@ -15239,7 +15239,7 @@
           <a:p>
             <a:r>
               <a:rPr lang="en-US" dirty="0"/>
-              <a:t>Source: Qlik - Closed Repair Orders. Customer pay, by close date. Same-store, 33 stores (INEOS excluded, opened 2026). GMC Prescott body shop labor types excluded. CP gross = CP labor gross + CP parts gross. Change is Jul-Sep 2026 (Q3) vs Jan-Mar 2026 (Q1), each store against itself. Gross and ROs are per-month averages of each quarter. The group's own Q1-to-Q3 change is the seasonal baseline: it is the same for every store, so ranking by a store's change is the same as ranking by how far it beat the group. 'Stepped up in' = the month that best splits the store's year into a lower stretch before and a higher stretch after (at least three months before, two after). It is a conversation starter, not proof of cause.
+              <a:t>Takeaway (off the slide): Lexus went 425 to 570, stepping up in April. Ask what changed that month.Source: Qlik - Closed Repair Orders. Customer pay, by close date. Same-store, 33 stores (INEOS excluded, opened 2026). GMC Prescott body shop labor types excluded. CP gross = CP labor gross + CP parts gross. Change is Jul-Sep 2026 (Q3) vs Jan-Mar 2026 (Q1), each store against itself. Gross and ROs are per-month averages of each quarter. The group's own Q1-to-Q3 change is the seasonal baseline: it is the same for every store, so ranking by a store's change is the same as ranking by how far it beat the group. 'Stepped up in' = the month that best splits the store's year into a lower stretch before and a higher stretch after (at least three months before, two after). It is a conversation starter, not proof of cause.
 Review note: the month line is the store's own monthly cp ros per month, so a step up shows as the line moving to a higher level and staying there. Volume measures (gross, ROs) still carry some store-specific seasonality (snowbird markets) the group baseline cannot fully remove; the rate measures are the cleanest read.</a:t>
             </a:r>
             <a:endParaRPr lang="en-US" dirty="0"/>
@@ -15328,7 +15328,7 @@
           <a:p>
             <a:r>
               <a:rPr lang="en-US" dirty="0"/>
-              <a:t>Source: Qlik - Closed Repair Orders. Customer pay, by close date. Same-store, 33 stores (INEOS excluded, opened 2026). GMC Prescott body shop labor types excluded. CP gross = CP labor gross + CP parts gross. Change is Jul-Sep 2026 (Q3) vs Jan-Mar 2026 (Q1), each store against itself. Gross and ROs are per-month averages of each quarter. The group's own Q1-to-Q3 change is the seasonal baseline: it is the same for every store, so ranking by a store's change is the same as ranking by how far it beat the group. 'Stepped up in' = the month that best splits the store's year into a lower stretch before and a higher stretch after (at least three months before, two after). It is a conversation starter, not proof of cause.
+              <a:t>Takeaway (off the slide): Mazda went 1.35 to 1.65, stepping up in August. Ask what changed that month.Source: Qlik - Closed Repair Orders. Customer pay, by close date. Same-store, 33 stores (INEOS excluded, opened 2026). GMC Prescott body shop labor types excluded. CP gross = CP labor gross + CP parts gross. Change is Jul-Sep 2026 (Q3) vs Jan-Mar 2026 (Q1), each store against itself. Gross and ROs are per-month averages of each quarter. The group's own Q1-to-Q3 change is the seasonal baseline: it is the same for every store, so ranking by a store's change is the same as ranking by how far it beat the group. 'Stepped up in' = the month that best splits the store's year into a lower stretch before and a higher stretch after (at least three months before, two after). It is a conversation starter, not proof of cause.
 Review note: the month line is the store's own monthly cp hours per ro, so a step up shows as the line moving to a higher level and staying there. Volume measures (gross, ROs) still carry some store-specific seasonality (snowbird markets) the group baseline cannot fully remove; the rate measures are the cleanest read.</a:t>
             </a:r>
             <a:endParaRPr lang="en-US" dirty="0"/>
@@ -15417,7 +15417,7 @@
           <a:p>
             <a:r>
               <a:rPr lang="en-US" dirty="0"/>
-              <a:t>Source: Qlik - Closed Repair Orders. Customer pay, by close date. Same-store, 33 stores (INEOS excluded, opened 2026). GMC Prescott body shop labor types excluded. CP gross = CP labor gross + CP parts gross. Change is Jul-Sep 2026 (Q3) vs Jan-Mar 2026 (Q1), each store against itself. Gross and ROs are per-month averages of each quarter. The group's own Q1-to-Q3 change is the seasonal baseline: it is the same for every store, so ranking by a store's change is the same as ranking by how far it beat the group. 'Stepped up in' = the month that best splits the store's year into a lower stretch before and a higher stretch after (at least three months before, two after). It is a conversation starter, not proof of cause.
+              <a:t>Takeaway (off the slide): VW St George went $128.27 to $141.89, stepping up in June. Ask what changed that month.Source: Qlik - Closed Repair Orders. Customer pay, by close date. Same-store, 33 stores (INEOS excluded, opened 2026). GMC Prescott body shop labor types excluded. CP gross = CP labor gross + CP parts gross. Change is Jul-Sep 2026 (Q3) vs Jan-Mar 2026 (Q1), each store against itself. Gross and ROs are per-month averages of each quarter. The group's own Q1-to-Q3 change is the seasonal baseline: it is the same for every store, so ranking by a store's change is the same as ranking by how far it beat the group. 'Stepped up in' = the month that best splits the store's year into a lower stretch before and a higher stretch after (at least three months before, two after). It is a conversation starter, not proof of cause.
 Review note: the month line is the store's own monthly cp elr, so a step up shows as the line moving to a higher level and staying there. Volume measures (gross, ROs) still carry some store-specific seasonality (snowbird markets) the group baseline cannot fully remove; the rate measures are the cleanest read.</a:t>
             </a:r>
             <a:endParaRPr lang="en-US" dirty="0"/>
@@ -15506,7 +15506,7 @@
           <a:p>
             <a:r>
               <a:rPr lang="en-US" dirty="0"/>
-              <a:t>Source: Qlik - Closed Repair Orders. Customer pay, by close date. Same-store, 33 stores (INEOS excluded, opened 2026). GMC Prescott body shop labor types excluded. CP gross = CP labor gross + CP parts gross. Change is Jul-Sep 2026 (Q3) vs Jan-Mar 2026 (Q1), each store against itself. Gross and ROs are per-month averages of each quarter. The group's own Q1-to-Q3 change is the seasonal baseline: it is the same for every store, so ranking by a store's change is the same as ranking by how far it beat the group. 'Stepped up in' = the month that best splits the store's year into a lower stretch before and a higher stretch after (at least three months before, two after). It is a conversation starter, not proof of cause.
+              <a:t>Takeaway (off the slide): VW St George went $224 to $298, stepping up in June. Ask what changed that month.Source: Qlik - Closed Repair Orders. Customer pay, by close date. Same-store, 33 stores (INEOS excluded, opened 2026). GMC Prescott body shop labor types excluded. CP gross = CP labor gross + CP parts gross. Change is Jul-Sep 2026 (Q3) vs Jan-Mar 2026 (Q1), each store against itself. Gross and ROs are per-month averages of each quarter. The group's own Q1-to-Q3 change is the seasonal baseline: it is the same for every store, so ranking by a store's change is the same as ranking by how far it beat the group. 'Stepped up in' = the month that best splits the store's year into a lower stretch before and a higher stretch after (at least three months before, two after). It is a conversation starter, not proof of cause.
 Review note: the month line is the store's own monthly cp parts $ per ro, so a step up shows as the line moving to a higher level and staying there. Volume measures (gross, ROs) still carry some store-specific seasonality (snowbird markets) the group baseline cannot fully remove; the rate measures are the cleanest read.</a:t>
             </a:r>
             <a:endParaRPr lang="en-US" dirty="0"/>
@@ -15595,7 +15595,7 @@
           <a:p>
             <a:r>
               <a:rPr lang="en-US" dirty="0"/>
-              <a:t>Source: Qlik - Closed Repair Orders. Customer pay, by close date. Same-store, 33 stores (INEOS excluded, opened 2026). GMC Prescott body shop labor types excluded. CP gross = CP labor gross + CP parts gross. Change is Jul-Sep 2026 (Q3) vs Jan-Mar 2026 (Q1), each store against itself. Gross and ROs are per-month averages of each quarter. The group's own Q1-to-Q3 change is the seasonal baseline: it is the same for every store, so ranking by a store's change is the same as ranking by how far it beat the group. 'Stepped up in' = the month that best splits the store's year into a lower stretch before and a higher stretch after (at least three months before, two after). It is a conversation starter, not proof of cause.
+              <a:t>Takeaway (off the slide): Acura went 39.4% to 46.6%, stepping up in April. Ask what changed that month.Source: Qlik - Closed Repair Orders. Customer pay, by close date. Same-store, 33 stores (INEOS excluded, opened 2026). GMC Prescott body shop labor types excluded. CP gross = CP labor gross + CP parts gross. Change is Jul-Sep 2026 (Q3) vs Jan-Mar 2026 (Q1), each store against itself. Gross and ROs are per-month averages of each quarter. The group's own Q1-to-Q3 change is the seasonal baseline: it is the same for every store, so ranking by a store's change is the same as ranking by how far it beat the group. 'Stepped up in' = the month that best splits the store's year into a lower stretch before and a higher stretch after (at least three months before, two after). It is a conversation starter, not proof of cause.
 Review note: the month line is the store's own monthly cp parts gp %, so a step up shows as the line moving to a higher level and staying there. Volume measures (gross, ROs) still carry some store-specific seasonality (snowbird markets) the group baseline cannot fully remove; the rate measures are the cleanest read.</a:t>
             </a:r>
             <a:endParaRPr lang="en-US" dirty="0"/>
@@ -15684,7 +15684,7 @@
           <a:p>
             <a:r>
               <a:rPr lang="en-US" dirty="0"/>
-              <a:t>Source: Qlik - Closed Repair Orders. Customer pay, by close date. Same-store, 33 stores (INEOS excluded, opened 2026). GMC Prescott body shop labor types excluded. CP gross = CP labor gross + CP parts gross. Change is Jul-Sep 2026 (Q3) vs Jan-Mar 2026 (Q1), each store against itself. Gross and ROs are per-month averages of each quarter. The group's own Q1-to-Q3 change is the seasonal baseline: it is the same for every store, so ranking by a store's change is the same as ranking by how far it beat the group. 'Stepped up in' = the month that best splits the store's year into a lower stretch before and a higher stretch after (at least three months before, two after). It is a conversation starter, not proof of cause. Opcode closing % = ROs with the service ÷ customer-pay ROs on the op-code report basis, same as the Opcode Benchmarks slides.
+              <a:t>Takeaway (off the slide): Audi Henderson went 21.1% to 31.7%, stepping up in May. Ask what changed that month.Source: Qlik - Closed Repair Orders. Customer pay, by close date. Same-store, 33 stores (INEOS excluded, opened 2026). GMC Prescott body shop labor types excluded. CP gross = CP labor gross + CP parts gross. Change is Jul-Sep 2026 (Q3) vs Jan-Mar 2026 (Q1), each store against itself. Gross and ROs are per-month averages of each quarter. The group's own Q1-to-Q3 change is the seasonal baseline: it is the same for every store, so ranking by a store's change is the same as ranking by how far it beat the group. 'Stepped up in' = the month that best splits the store's year into a lower stretch before and a higher stretch after (at least three months before, two after). It is a conversation starter, not proof of cause. Opcode closing % = ROs with the service ÷ customer-pay ROs on the op-code report basis, same as the Opcode Benchmarks slides.
 Review note: the month line is the store's own monthly alignment %, so a step up shows as the line moving to a higher level and staying there. Volume measures (gross, ROs) still carry some store-specific seasonality (snowbird markets) the group baseline cannot fully remove; the rate measures are the cleanest read.</a:t>
             </a:r>
             <a:endParaRPr lang="en-US" dirty="0"/>
@@ -15773,7 +15773,7 @@
           <a:p>
             <a:r>
               <a:rPr lang="en-US" dirty="0"/>
-              <a:t>Source: Qlik - Closed Repair Orders. Customer pay, by close date. Same-store, 33 stores (INEOS excluded, opened 2026). GMC Prescott body shop labor types excluded. CP gross = CP labor gross + CP parts gross. Change is Jul-Sep 2026 (Q3) vs Jan-Mar 2026 (Q1), each store against itself. Gross and ROs are per-month averages of each quarter. The group's own Q1-to-Q3 change is the seasonal baseline: it is the same for every store, so ranking by a store's change is the same as ranking by how far it beat the group. 'Stepped up in' = the month that best splits the store's year into a lower stretch before and a higher stretch after (at least three months before, two after). It is a conversation starter, not proof of cause. Opcode closing % = ROs with the service ÷ customer-pay ROs on the op-code report basis, same as the Opcode Benchmarks slides.
+              <a:t>Takeaway (off the slide): Mazda went 10.1% to 19.3%, stepping up in August. Ask what changed that month.Source: Qlik - Closed Repair Orders. Customer pay, by close date. Same-store, 33 stores (INEOS excluded, opened 2026). GMC Prescott body shop labor types excluded. CP gross = CP labor gross + CP parts gross. Change is Jul-Sep 2026 (Q3) vs Jan-Mar 2026 (Q1), each store against itself. Gross and ROs are per-month averages of each quarter. The group's own Q1-to-Q3 change is the seasonal baseline: it is the same for every store, so ranking by a store's change is the same as ranking by how far it beat the group. 'Stepped up in' = the month that best splits the store's year into a lower stretch before and a higher stretch after (at least three months before, two after). It is a conversation starter, not proof of cause. Opcode closing % = ROs with the service ÷ customer-pay ROs on the op-code report basis, same as the Opcode Benchmarks slides.
 Review note: the month line is the store's own monthly balance %, so a step up shows as the line moving to a higher level and staying there. Volume measures (gross, ROs) still carry some store-specific seasonality (snowbird markets) the group baseline cannot fully remove; the rate measures are the cleanest read.</a:t>
             </a:r>
             <a:endParaRPr lang="en-US" dirty="0"/>
@@ -15862,7 +15862,7 @@
           <a:p>
             <a:r>
               <a:rPr lang="en-US" dirty="0"/>
-              <a:t>Source: Qlik - Closed Repair Orders. Customer pay, by close date. Same-store, 33 stores (INEOS excluded, opened 2026). GMC Prescott body shop labor types excluded. CP gross = CP labor gross + CP parts gross. Change is Jul-Sep 2026 (Q3) vs Jan-Mar 2026 (Q1), each store against itself. Gross and ROs are per-month averages of each quarter. The group's own Q1-to-Q3 change is the seasonal baseline: it is the same for every store, so ranking by a store's change is the same as ranking by how far it beat the group. 'Stepped up in' = the month that best splits the store's year into a lower stretch before and a higher stretch after (at least three months before, two after). It is a conversation starter, not proof of cause. Opcode closing % = ROs with the service ÷ customer-pay ROs on the op-code report basis, same as the Opcode Benchmarks slides.
+              <a:t>Takeaway (off the slide): Mazda went 5.2% to 14.1%, stepping up in August. Ask what changed that month.Source: Qlik - Closed Repair Orders. Customer pay, by close date. Same-store, 33 stores (INEOS excluded, opened 2026). GMC Prescott body shop labor types excluded. CP gross = CP labor gross + CP parts gross. Change is Jul-Sep 2026 (Q3) vs Jan-Mar 2026 (Q1), each store against itself. Gross and ROs are per-month averages of each quarter. The group's own Q1-to-Q3 change is the seasonal baseline: it is the same for every store, so ranking by a store's change is the same as ranking by how far it beat the group. 'Stepped up in' = the month that best splits the store's year into a lower stretch before and a higher stretch after (at least three months before, two after). It is a conversation starter, not proof of cause. Opcode closing % = ROs with the service ÷ customer-pay ROs on the op-code report basis, same as the Opcode Benchmarks slides.
 Review note: the month line is the store's own monthly brake fluid %, so a step up shows as the line moving to a higher level and staying there. Volume measures (gross, ROs) still carry some store-specific seasonality (snowbird markets) the group baseline cannot fully remove; the rate measures are the cleanest read.</a:t>
             </a:r>
             <a:endParaRPr lang="en-US" dirty="0"/>
@@ -17804,65 +17804,6 @@
           </a:p>
         </p:txBody>
       </p:sp>
-      <p:sp>
-        <p:nvSpPr>
-          <p:cNvPr id="44" name="Shape 37"/>
-          <p:cNvSpPr/>
-          <p:nvPr/>
-        </p:nvSpPr>
-        <p:spPr>
-          <a:xfrm>
-            <a:off x="457200" y="6126480"/>
-            <a:ext cx="11274552" cy="371856"/>
-          </a:xfrm>
-          <a:prstGeom prst="rect">
-            <a:avLst/>
-          </a:prstGeom>
-          <a:solidFill>
-            <a:srgbClr val="E6F6EE"/>
-          </a:solidFill>
-          <a:ln/>
-        </p:spPr>
-      </p:sp>
-      <p:sp>
-        <p:nvSpPr>
-          <p:cNvPr id="45" name="Text 38"/>
-          <p:cNvSpPr txBox="1"/>
-          <p:nvPr/>
-        </p:nvSpPr>
-        <p:spPr>
-          <a:xfrm>
-            <a:off x="658368" y="6144768"/>
-            <a:ext cx="10927080" cy="335280"/>
-          </a:xfrm>
-          <a:prstGeom prst="rect">
-            <a:avLst/>
-          </a:prstGeom>
-          <a:noFill/>
-          <a:ln/>
-        </p:spPr>
-        <p:txBody>
-          <a:bodyPr wrap="square" lIns="0" tIns="0" rIns="0" bIns="0" rtlCol="0" anchor="ctr"/>
-          <a:lstStyle/>
-          <a:p>
-            <a:pPr indent="0" marL="0">
-              <a:buNone/>
-            </a:pPr>
-            <a:r>
-              <a:rPr lang="en-US" sz="1600" b="1" dirty="0">
-                <a:solidFill>
-                  <a:srgbClr val="0B7A4A"/>
-                </a:solidFill>
-                <a:latin typeface="Inter" pitchFamily="34" charset="0"/>
-                <a:ea typeface="Inter" pitchFamily="34" charset="-122"/>
-                <a:cs typeface="Inter" pitchFamily="34" charset="-120"/>
-              </a:rPr>
-              <a:t>Mazda went $155K to $209K, stepping up in August. Ask what changed that month.</a:t>
-            </a:r>
-            <a:endParaRPr lang="en-US" sz="1600" dirty="0"/>
-          </a:p>
-        </p:txBody>
-      </p:sp>
     </p:spTree>
   </p:cSld>
   <p:clrMapOvr>
@@ -19463,65 +19404,6 @@
           </a:p>
         </p:txBody>
       </p:sp>
-      <p:sp>
-        <p:nvSpPr>
-          <p:cNvPr id="44" name="Shape 37"/>
-          <p:cNvSpPr/>
-          <p:nvPr/>
-        </p:nvSpPr>
-        <p:spPr>
-          <a:xfrm>
-            <a:off x="457200" y="6126480"/>
-            <a:ext cx="11274552" cy="371856"/>
-          </a:xfrm>
-          <a:prstGeom prst="rect">
-            <a:avLst/>
-          </a:prstGeom>
-          <a:solidFill>
-            <a:srgbClr val="E6F6EE"/>
-          </a:solidFill>
-          <a:ln/>
-        </p:spPr>
-      </p:sp>
-      <p:sp>
-        <p:nvSpPr>
-          <p:cNvPr id="45" name="Text 38"/>
-          <p:cNvSpPr txBox="1"/>
-          <p:nvPr/>
-        </p:nvSpPr>
-        <p:spPr>
-          <a:xfrm>
-            <a:off x="658368" y="6144768"/>
-            <a:ext cx="10927080" cy="335280"/>
-          </a:xfrm>
-          <a:prstGeom prst="rect">
-            <a:avLst/>
-          </a:prstGeom>
-          <a:noFill/>
-          <a:ln/>
-        </p:spPr>
-        <p:txBody>
-          <a:bodyPr wrap="square" lIns="0" tIns="0" rIns="0" bIns="0" rtlCol="0" anchor="ctr"/>
-          <a:lstStyle/>
-          <a:p>
-            <a:pPr indent="0" marL="0">
-              <a:buNone/>
-            </a:pPr>
-            <a:r>
-              <a:rPr lang="en-US" sz="1600" b="1" dirty="0">
-                <a:solidFill>
-                  <a:srgbClr val="0B7A4A"/>
-                </a:solidFill>
-                <a:latin typeface="Inter" pitchFamily="34" charset="0"/>
-                <a:ea typeface="Inter" pitchFamily="34" charset="-122"/>
-                <a:cs typeface="Inter" pitchFamily="34" charset="-120"/>
-              </a:rPr>
-              <a:t>Mazda went 2.5% to 10.7%, stepping up in August. Ask what changed that month.</a:t>
-            </a:r>
-            <a:endParaRPr lang="en-US" sz="1600" dirty="0"/>
-          </a:p>
-        </p:txBody>
-      </p:sp>
     </p:spTree>
   </p:cSld>
   <p:clrMapOvr>
@@ -21122,65 +21004,6 @@
           </a:p>
         </p:txBody>
       </p:sp>
-      <p:sp>
-        <p:nvSpPr>
-          <p:cNvPr id="44" name="Shape 37"/>
-          <p:cNvSpPr/>
-          <p:nvPr/>
-        </p:nvSpPr>
-        <p:spPr>
-          <a:xfrm>
-            <a:off x="457200" y="6126480"/>
-            <a:ext cx="11274552" cy="371856"/>
-          </a:xfrm>
-          <a:prstGeom prst="rect">
-            <a:avLst/>
-          </a:prstGeom>
-          <a:solidFill>
-            <a:srgbClr val="E6F6EE"/>
-          </a:solidFill>
-          <a:ln/>
-        </p:spPr>
-      </p:sp>
-      <p:sp>
-        <p:nvSpPr>
-          <p:cNvPr id="45" name="Text 38"/>
-          <p:cNvSpPr txBox="1"/>
-          <p:nvPr/>
-        </p:nvSpPr>
-        <p:spPr>
-          <a:xfrm>
-            <a:off x="658368" y="6144768"/>
-            <a:ext cx="10927080" cy="335280"/>
-          </a:xfrm>
-          <a:prstGeom prst="rect">
-            <a:avLst/>
-          </a:prstGeom>
-          <a:noFill/>
-          <a:ln/>
-        </p:spPr>
-        <p:txBody>
-          <a:bodyPr wrap="square" lIns="0" tIns="0" rIns="0" bIns="0" rtlCol="0" anchor="ctr"/>
-          <a:lstStyle/>
-          <a:p>
-            <a:pPr indent="0" marL="0">
-              <a:buNone/>
-            </a:pPr>
-            <a:r>
-              <a:rPr lang="en-US" sz="1600" b="1" dirty="0">
-                <a:solidFill>
-                  <a:srgbClr val="0B7A4A"/>
-                </a:solidFill>
-                <a:latin typeface="Inter" pitchFamily="34" charset="0"/>
-                <a:ea typeface="Inter" pitchFamily="34" charset="-122"/>
-                <a:cs typeface="Inter" pitchFamily="34" charset="-120"/>
-              </a:rPr>
-              <a:t>Lexus went 425 to 570, stepping up in April. Ask what changed that month.</a:t>
-            </a:r>
-            <a:endParaRPr lang="en-US" sz="1600" dirty="0"/>
-          </a:p>
-        </p:txBody>
-      </p:sp>
     </p:spTree>
   </p:cSld>
   <p:clrMapOvr>
@@ -22781,65 +22604,6 @@
           </a:p>
         </p:txBody>
       </p:sp>
-      <p:sp>
-        <p:nvSpPr>
-          <p:cNvPr id="44" name="Shape 37"/>
-          <p:cNvSpPr/>
-          <p:nvPr/>
-        </p:nvSpPr>
-        <p:spPr>
-          <a:xfrm>
-            <a:off x="457200" y="6126480"/>
-            <a:ext cx="11274552" cy="371856"/>
-          </a:xfrm>
-          <a:prstGeom prst="rect">
-            <a:avLst/>
-          </a:prstGeom>
-          <a:solidFill>
-            <a:srgbClr val="E6F6EE"/>
-          </a:solidFill>
-          <a:ln/>
-        </p:spPr>
-      </p:sp>
-      <p:sp>
-        <p:nvSpPr>
-          <p:cNvPr id="45" name="Text 38"/>
-          <p:cNvSpPr txBox="1"/>
-          <p:nvPr/>
-        </p:nvSpPr>
-        <p:spPr>
-          <a:xfrm>
-            <a:off x="658368" y="6144768"/>
-            <a:ext cx="10927080" cy="335280"/>
-          </a:xfrm>
-          <a:prstGeom prst="rect">
-            <a:avLst/>
-          </a:prstGeom>
-          <a:noFill/>
-          <a:ln/>
-        </p:spPr>
-        <p:txBody>
-          <a:bodyPr wrap="square" lIns="0" tIns="0" rIns="0" bIns="0" rtlCol="0" anchor="ctr"/>
-          <a:lstStyle/>
-          <a:p>
-            <a:pPr indent="0" marL="0">
-              <a:buNone/>
-            </a:pPr>
-            <a:r>
-              <a:rPr lang="en-US" sz="1600" b="1" dirty="0">
-                <a:solidFill>
-                  <a:srgbClr val="0B7A4A"/>
-                </a:solidFill>
-                <a:latin typeface="Inter" pitchFamily="34" charset="0"/>
-                <a:ea typeface="Inter" pitchFamily="34" charset="-122"/>
-                <a:cs typeface="Inter" pitchFamily="34" charset="-120"/>
-              </a:rPr>
-              <a:t>Mazda went 1.35 to 1.65, stepping up in August. Ask what changed that month.</a:t>
-            </a:r>
-            <a:endParaRPr lang="en-US" sz="1600" dirty="0"/>
-          </a:p>
-        </p:txBody>
-      </p:sp>
     </p:spTree>
   </p:cSld>
   <p:clrMapOvr>
@@ -24440,65 +24204,6 @@
           </a:p>
         </p:txBody>
       </p:sp>
-      <p:sp>
-        <p:nvSpPr>
-          <p:cNvPr id="44" name="Shape 37"/>
-          <p:cNvSpPr/>
-          <p:nvPr/>
-        </p:nvSpPr>
-        <p:spPr>
-          <a:xfrm>
-            <a:off x="457200" y="6126480"/>
-            <a:ext cx="11274552" cy="371856"/>
-          </a:xfrm>
-          <a:prstGeom prst="rect">
-            <a:avLst/>
-          </a:prstGeom>
-          <a:solidFill>
-            <a:srgbClr val="E6F6EE"/>
-          </a:solidFill>
-          <a:ln/>
-        </p:spPr>
-      </p:sp>
-      <p:sp>
-        <p:nvSpPr>
-          <p:cNvPr id="45" name="Text 38"/>
-          <p:cNvSpPr txBox="1"/>
-          <p:nvPr/>
-        </p:nvSpPr>
-        <p:spPr>
-          <a:xfrm>
-            <a:off x="658368" y="6144768"/>
-            <a:ext cx="10927080" cy="335280"/>
-          </a:xfrm>
-          <a:prstGeom prst="rect">
-            <a:avLst/>
-          </a:prstGeom>
-          <a:noFill/>
-          <a:ln/>
-        </p:spPr>
-        <p:txBody>
-          <a:bodyPr wrap="square" lIns="0" tIns="0" rIns="0" bIns="0" rtlCol="0" anchor="ctr"/>
-          <a:lstStyle/>
-          <a:p>
-            <a:pPr indent="0" marL="0">
-              <a:buNone/>
-            </a:pPr>
-            <a:r>
-              <a:rPr lang="en-US" sz="1600" b="1" dirty="0">
-                <a:solidFill>
-                  <a:srgbClr val="0B7A4A"/>
-                </a:solidFill>
-                <a:latin typeface="Inter" pitchFamily="34" charset="0"/>
-                <a:ea typeface="Inter" pitchFamily="34" charset="-122"/>
-                <a:cs typeface="Inter" pitchFamily="34" charset="-120"/>
-              </a:rPr>
-              <a:t>VW St George went $128.27 to $141.89, stepping up in June. Ask what changed that month.</a:t>
-            </a:r>
-            <a:endParaRPr lang="en-US" sz="1600" dirty="0"/>
-          </a:p>
-        </p:txBody>
-      </p:sp>
     </p:spTree>
   </p:cSld>
   <p:clrMapOvr>
@@ -26099,65 +25804,6 @@
           </a:p>
         </p:txBody>
       </p:sp>
-      <p:sp>
-        <p:nvSpPr>
-          <p:cNvPr id="44" name="Shape 37"/>
-          <p:cNvSpPr/>
-          <p:nvPr/>
-        </p:nvSpPr>
-        <p:spPr>
-          <a:xfrm>
-            <a:off x="457200" y="6126480"/>
-            <a:ext cx="11274552" cy="371856"/>
-          </a:xfrm>
-          <a:prstGeom prst="rect">
-            <a:avLst/>
-          </a:prstGeom>
-          <a:solidFill>
-            <a:srgbClr val="E6F6EE"/>
-          </a:solidFill>
-          <a:ln/>
-        </p:spPr>
-      </p:sp>
-      <p:sp>
-        <p:nvSpPr>
-          <p:cNvPr id="45" name="Text 38"/>
-          <p:cNvSpPr txBox="1"/>
-          <p:nvPr/>
-        </p:nvSpPr>
-        <p:spPr>
-          <a:xfrm>
-            <a:off x="658368" y="6144768"/>
-            <a:ext cx="10927080" cy="335280"/>
-          </a:xfrm>
-          <a:prstGeom prst="rect">
-            <a:avLst/>
-          </a:prstGeom>
-          <a:noFill/>
-          <a:ln/>
-        </p:spPr>
-        <p:txBody>
-          <a:bodyPr wrap="square" lIns="0" tIns="0" rIns="0" bIns="0" rtlCol="0" anchor="ctr"/>
-          <a:lstStyle/>
-          <a:p>
-            <a:pPr indent="0" marL="0">
-              <a:buNone/>
-            </a:pPr>
-            <a:r>
-              <a:rPr lang="en-US" sz="1600" b="1" dirty="0">
-                <a:solidFill>
-                  <a:srgbClr val="0B7A4A"/>
-                </a:solidFill>
-                <a:latin typeface="Inter" pitchFamily="34" charset="0"/>
-                <a:ea typeface="Inter" pitchFamily="34" charset="-122"/>
-                <a:cs typeface="Inter" pitchFamily="34" charset="-120"/>
-              </a:rPr>
-              <a:t>VW St George went $224 to $298, stepping up in June. Ask what changed that month.</a:t>
-            </a:r>
-            <a:endParaRPr lang="en-US" sz="1600" dirty="0"/>
-          </a:p>
-        </p:txBody>
-      </p:sp>
     </p:spTree>
   </p:cSld>
   <p:clrMapOvr>
@@ -27758,65 +27404,6 @@
           </a:p>
         </p:txBody>
       </p:sp>
-      <p:sp>
-        <p:nvSpPr>
-          <p:cNvPr id="44" name="Shape 37"/>
-          <p:cNvSpPr/>
-          <p:nvPr/>
-        </p:nvSpPr>
-        <p:spPr>
-          <a:xfrm>
-            <a:off x="457200" y="6126480"/>
-            <a:ext cx="11274552" cy="371856"/>
-          </a:xfrm>
-          <a:prstGeom prst="rect">
-            <a:avLst/>
-          </a:prstGeom>
-          <a:solidFill>
-            <a:srgbClr val="E6F6EE"/>
-          </a:solidFill>
-          <a:ln/>
-        </p:spPr>
-      </p:sp>
-      <p:sp>
-        <p:nvSpPr>
-          <p:cNvPr id="45" name="Text 38"/>
-          <p:cNvSpPr txBox="1"/>
-          <p:nvPr/>
-        </p:nvSpPr>
-        <p:spPr>
-          <a:xfrm>
-            <a:off x="658368" y="6144768"/>
-            <a:ext cx="10927080" cy="335280"/>
-          </a:xfrm>
-          <a:prstGeom prst="rect">
-            <a:avLst/>
-          </a:prstGeom>
-          <a:noFill/>
-          <a:ln/>
-        </p:spPr>
-        <p:txBody>
-          <a:bodyPr wrap="square" lIns="0" tIns="0" rIns="0" bIns="0" rtlCol="0" anchor="ctr"/>
-          <a:lstStyle/>
-          <a:p>
-            <a:pPr indent="0" marL="0">
-              <a:buNone/>
-            </a:pPr>
-            <a:r>
-              <a:rPr lang="en-US" sz="1600" b="1" dirty="0">
-                <a:solidFill>
-                  <a:srgbClr val="0B7A4A"/>
-                </a:solidFill>
-                <a:latin typeface="Inter" pitchFamily="34" charset="0"/>
-                <a:ea typeface="Inter" pitchFamily="34" charset="-122"/>
-                <a:cs typeface="Inter" pitchFamily="34" charset="-120"/>
-              </a:rPr>
-              <a:t>Acura went 39.4% to 46.6%, stepping up in April. Ask what changed that month.</a:t>
-            </a:r>
-            <a:endParaRPr lang="en-US" sz="1600" dirty="0"/>
-          </a:p>
-        </p:txBody>
-      </p:sp>
     </p:spTree>
   </p:cSld>
   <p:clrMapOvr>
@@ -29417,65 +29004,6 @@
           </a:p>
         </p:txBody>
       </p:sp>
-      <p:sp>
-        <p:nvSpPr>
-          <p:cNvPr id="44" name="Shape 37"/>
-          <p:cNvSpPr/>
-          <p:nvPr/>
-        </p:nvSpPr>
-        <p:spPr>
-          <a:xfrm>
-            <a:off x="457200" y="6126480"/>
-            <a:ext cx="11274552" cy="371856"/>
-          </a:xfrm>
-          <a:prstGeom prst="rect">
-            <a:avLst/>
-          </a:prstGeom>
-          <a:solidFill>
-            <a:srgbClr val="E6F6EE"/>
-          </a:solidFill>
-          <a:ln/>
-        </p:spPr>
-      </p:sp>
-      <p:sp>
-        <p:nvSpPr>
-          <p:cNvPr id="45" name="Text 38"/>
-          <p:cNvSpPr txBox="1"/>
-          <p:nvPr/>
-        </p:nvSpPr>
-        <p:spPr>
-          <a:xfrm>
-            <a:off x="658368" y="6144768"/>
-            <a:ext cx="10927080" cy="335280"/>
-          </a:xfrm>
-          <a:prstGeom prst="rect">
-            <a:avLst/>
-          </a:prstGeom>
-          <a:noFill/>
-          <a:ln/>
-        </p:spPr>
-        <p:txBody>
-          <a:bodyPr wrap="square" lIns="0" tIns="0" rIns="0" bIns="0" rtlCol="0" anchor="ctr"/>
-          <a:lstStyle/>
-          <a:p>
-            <a:pPr indent="0" marL="0">
-              <a:buNone/>
-            </a:pPr>
-            <a:r>
-              <a:rPr lang="en-US" sz="1600" b="1" dirty="0">
-                <a:solidFill>
-                  <a:srgbClr val="0B7A4A"/>
-                </a:solidFill>
-                <a:latin typeface="Inter" pitchFamily="34" charset="0"/>
-                <a:ea typeface="Inter" pitchFamily="34" charset="-122"/>
-                <a:cs typeface="Inter" pitchFamily="34" charset="-120"/>
-              </a:rPr>
-              <a:t>Audi Henderson went 21.1% to 31.7%, stepping up in May. Ask what changed that month.</a:t>
-            </a:r>
-            <a:endParaRPr lang="en-US" sz="1600" dirty="0"/>
-          </a:p>
-        </p:txBody>
-      </p:sp>
     </p:spTree>
   </p:cSld>
   <p:clrMapOvr>
@@ -31076,65 +30604,6 @@
           </a:p>
         </p:txBody>
       </p:sp>
-      <p:sp>
-        <p:nvSpPr>
-          <p:cNvPr id="44" name="Shape 37"/>
-          <p:cNvSpPr/>
-          <p:nvPr/>
-        </p:nvSpPr>
-        <p:spPr>
-          <a:xfrm>
-            <a:off x="457200" y="6126480"/>
-            <a:ext cx="11274552" cy="371856"/>
-          </a:xfrm>
-          <a:prstGeom prst="rect">
-            <a:avLst/>
-          </a:prstGeom>
-          <a:solidFill>
-            <a:srgbClr val="E6F6EE"/>
-          </a:solidFill>
-          <a:ln/>
-        </p:spPr>
-      </p:sp>
-      <p:sp>
-        <p:nvSpPr>
-          <p:cNvPr id="45" name="Text 38"/>
-          <p:cNvSpPr txBox="1"/>
-          <p:nvPr/>
-        </p:nvSpPr>
-        <p:spPr>
-          <a:xfrm>
-            <a:off x="658368" y="6144768"/>
-            <a:ext cx="10927080" cy="335280"/>
-          </a:xfrm>
-          <a:prstGeom prst="rect">
-            <a:avLst/>
-          </a:prstGeom>
-          <a:noFill/>
-          <a:ln/>
-        </p:spPr>
-        <p:txBody>
-          <a:bodyPr wrap="square" lIns="0" tIns="0" rIns="0" bIns="0" rtlCol="0" anchor="ctr"/>
-          <a:lstStyle/>
-          <a:p>
-            <a:pPr indent="0" marL="0">
-              <a:buNone/>
-            </a:pPr>
-            <a:r>
-              <a:rPr lang="en-US" sz="1600" b="1" dirty="0">
-                <a:solidFill>
-                  <a:srgbClr val="0B7A4A"/>
-                </a:solidFill>
-                <a:latin typeface="Inter" pitchFamily="34" charset="0"/>
-                <a:ea typeface="Inter" pitchFamily="34" charset="-122"/>
-                <a:cs typeface="Inter" pitchFamily="34" charset="-120"/>
-              </a:rPr>
-              <a:t>Mazda went 10.1% to 19.3%, stepping up in August. Ask what changed that month.</a:t>
-            </a:r>
-            <a:endParaRPr lang="en-US" sz="1600" dirty="0"/>
-          </a:p>
-        </p:txBody>
-      </p:sp>
     </p:spTree>
   </p:cSld>
   <p:clrMapOvr>
@@ -32730,65 +32199,6 @@
                 <a:cs typeface="Inter" pitchFamily="34" charset="-120"/>
               </a:rPr>
               <a:t>+2.1 pts</a:t>
-            </a:r>
-            <a:endParaRPr lang="en-US" sz="1600" dirty="0"/>
-          </a:p>
-        </p:txBody>
-      </p:sp>
-      <p:sp>
-        <p:nvSpPr>
-          <p:cNvPr id="44" name="Shape 37"/>
-          <p:cNvSpPr/>
-          <p:nvPr/>
-        </p:nvSpPr>
-        <p:spPr>
-          <a:xfrm>
-            <a:off x="457200" y="6126480"/>
-            <a:ext cx="11274552" cy="371856"/>
-          </a:xfrm>
-          <a:prstGeom prst="rect">
-            <a:avLst/>
-          </a:prstGeom>
-          <a:solidFill>
-            <a:srgbClr val="E6F6EE"/>
-          </a:solidFill>
-          <a:ln/>
-        </p:spPr>
-      </p:sp>
-      <p:sp>
-        <p:nvSpPr>
-          <p:cNvPr id="45" name="Text 38"/>
-          <p:cNvSpPr txBox="1"/>
-          <p:nvPr/>
-        </p:nvSpPr>
-        <p:spPr>
-          <a:xfrm>
-            <a:off x="658368" y="6144768"/>
-            <a:ext cx="10927080" cy="335280"/>
-          </a:xfrm>
-          <a:prstGeom prst="rect">
-            <a:avLst/>
-          </a:prstGeom>
-          <a:noFill/>
-          <a:ln/>
-        </p:spPr>
-        <p:txBody>
-          <a:bodyPr wrap="square" lIns="0" tIns="0" rIns="0" bIns="0" rtlCol="0" anchor="ctr"/>
-          <a:lstStyle/>
-          <a:p>
-            <a:pPr indent="0" marL="0">
-              <a:buNone/>
-            </a:pPr>
-            <a:r>
-              <a:rPr lang="en-US" sz="1600" b="1" dirty="0">
-                <a:solidFill>
-                  <a:srgbClr val="0B7A4A"/>
-                </a:solidFill>
-                <a:latin typeface="Inter" pitchFamily="34" charset="0"/>
-                <a:ea typeface="Inter" pitchFamily="34" charset="-122"/>
-                <a:cs typeface="Inter" pitchFamily="34" charset="-120"/>
-              </a:rPr>
-              <a:t>Mazda went 5.2% to 14.1%, stepping up in August. Ask what changed that month.</a:t>
             </a:r>
             <a:endParaRPr lang="en-US" sz="1600" dirty="0"/>
           </a:p>

--- a/day2-deck/decks/Who's Moving Now - Review.pptx
+++ b/day2-deck/decks/Who's Moving Now - Review.pptx
@@ -15061,7 +15061,7 @@
           <a:p>
             <a:r>
               <a:rPr lang="en-US" dirty="0"/>
-              <a:t>Takeaway (off the slide): Mazda went $155K to $209K, stepping up in August. Ask what changed that month.Source: Qlik - Closed Repair Orders. Customer pay, by close date. Same-store, 33 stores (INEOS excluded, opened 2026). GMC Prescott body shop labor types excluded. CP gross = CP labor gross + CP parts gross. Change is Jul-Sep 2026 (Q3) vs Jan-Mar 2026 (Q1), each store against itself. Gross and ROs are per-month averages of each quarter. The group's own Q1-to-Q3 change is the seasonal baseline: it is the same for every store, so ranking by a store's change is the same as ranking by how far it beat the group. 'Stepped up in' = the month that best splits the store's year into a lower stretch before and a higher stretch after (at least three months before, two after). It is a conversation starter, not proof of cause.
+              <a:t>Takeaway with the store call-outs (off the slide): Mazda went $155K to $209K, stepping up in August. Ask what changed that month.Source: Qlik - Closed Repair Orders. Customer pay, by close date. Same-store, 33 stores (INEOS excluded, opened 2026). GMC Prescott body shop labor types excluded. CP gross = CP labor gross + CP parts gross. Change is Jul-Sep 2026 (Q3) vs Jan-Mar 2026 (Q1), each store against itself. Gross and ROs are per-month averages of each quarter. The group's own Q1-to-Q3 change is the seasonal baseline: it is the same for every store, so ranking by a store's change is the same as ranking by how far it beat the group. 'Stepped up in' = the month that best splits the store's year into a lower stretch before and a higher stretch after (at least three months before, two after). It is a conversation starter, not proof of cause.
 Review note: the month line is the store's own monthly cp gross per month, so a step up shows as the line moving to a higher level and staying there. Volume measures (gross, ROs) still carry some store-specific seasonality (snowbird markets) the group baseline cannot fully remove; the rate measures are the cleanest read.</a:t>
             </a:r>
             <a:endParaRPr lang="en-US" dirty="0"/>
@@ -15150,7 +15150,7 @@
           <a:p>
             <a:r>
               <a:rPr lang="en-US" dirty="0"/>
-              <a:t>Takeaway (off the slide): Mazda went 2.5% to 10.7%, stepping up in August. Ask what changed that month.Source: Qlik - Closed Repair Orders. Customer pay, by close date. Same-store, 33 stores (INEOS excluded, opened 2026). GMC Prescott body shop labor types excluded. CP gross = CP labor gross + CP parts gross. Change is Jul-Sep 2026 (Q3) vs Jan-Mar 2026 (Q1), each store against itself. Gross and ROs are per-month averages of each quarter. The group's own Q1-to-Q3 change is the seasonal baseline: it is the same for every store, so ranking by a store's change is the same as ranking by how far it beat the group. 'Stepped up in' = the month that best splits the store's year into a lower stretch before and a higher stretch after (at least three months before, two after). It is a conversation starter, not proof of cause. Opcode closing % = ROs with the service ÷ customer-pay ROs on the op-code report basis, same as the Opcode Benchmarks slides.
+              <a:t>Takeaway with the store call-outs (off the slide): Mazda went 2.5% to 10.7%, stepping up in August. Ask what changed that month.Source: Qlik - Closed Repair Orders. Customer pay, by close date. Same-store, 33 stores (INEOS excluded, opened 2026). GMC Prescott body shop labor types excluded. CP gross = CP labor gross + CP parts gross. Change is Jul-Sep 2026 (Q3) vs Jan-Mar 2026 (Q1), each store against itself. Gross and ROs are per-month averages of each quarter. The group's own Q1-to-Q3 change is the seasonal baseline: it is the same for every store, so ranking by a store's change is the same as ranking by how far it beat the group. 'Stepped up in' = the month that best splits the store's year into a lower stretch before and a higher stretch after (at least three months before, two after). It is a conversation starter, not proof of cause. Opcode closing % = ROs with the service ÷ customer-pay ROs on the op-code report basis, same as the Opcode Benchmarks slides.
 Review note: the month line is the store's own monthly fuel service %, so a step up shows as the line moving to a higher level and staying there. Volume measures (gross, ROs) still carry some store-specific seasonality (snowbird markets) the group baseline cannot fully remove; the rate measures are the cleanest read.</a:t>
             </a:r>
             <a:endParaRPr lang="en-US" dirty="0"/>
@@ -15239,7 +15239,7 @@
           <a:p>
             <a:r>
               <a:rPr lang="en-US" dirty="0"/>
-              <a:t>Takeaway (off the slide): Lexus went 425 to 570, stepping up in April. Ask what changed that month.Source: Qlik - Closed Repair Orders. Customer pay, by close date. Same-store, 33 stores (INEOS excluded, opened 2026). GMC Prescott body shop labor types excluded. CP gross = CP labor gross + CP parts gross. Change is Jul-Sep 2026 (Q3) vs Jan-Mar 2026 (Q1), each store against itself. Gross and ROs are per-month averages of each quarter. The group's own Q1-to-Q3 change is the seasonal baseline: it is the same for every store, so ranking by a store's change is the same as ranking by how far it beat the group. 'Stepped up in' = the month that best splits the store's year into a lower stretch before and a higher stretch after (at least three months before, two after). It is a conversation starter, not proof of cause.
+              <a:t>Takeaway with the store call-outs (off the slide): Lexus went 425 to 570, stepping up in April. Ask what changed that month.Source: Qlik - Closed Repair Orders. Customer pay, by close date. Same-store, 33 stores (INEOS excluded, opened 2026). GMC Prescott body shop labor types excluded. CP gross = CP labor gross + CP parts gross. Change is Jul-Sep 2026 (Q3) vs Jan-Mar 2026 (Q1), each store against itself. Gross and ROs are per-month averages of each quarter. The group's own Q1-to-Q3 change is the seasonal baseline: it is the same for every store, so ranking by a store's change is the same as ranking by how far it beat the group. 'Stepped up in' = the month that best splits the store's year into a lower stretch before and a higher stretch after (at least three months before, two after). It is a conversation starter, not proof of cause.
 Review note: the month line is the store's own monthly cp ros per month, so a step up shows as the line moving to a higher level and staying there. Volume measures (gross, ROs) still carry some store-specific seasonality (snowbird markets) the group baseline cannot fully remove; the rate measures are the cleanest read.</a:t>
             </a:r>
             <a:endParaRPr lang="en-US" dirty="0"/>
@@ -15328,7 +15328,7 @@
           <a:p>
             <a:r>
               <a:rPr lang="en-US" dirty="0"/>
-              <a:t>Takeaway (off the slide): Mazda went 1.35 to 1.65, stepping up in August. Ask what changed that month.Source: Qlik - Closed Repair Orders. Customer pay, by close date. Same-store, 33 stores (INEOS excluded, opened 2026). GMC Prescott body shop labor types excluded. CP gross = CP labor gross + CP parts gross. Change is Jul-Sep 2026 (Q3) vs Jan-Mar 2026 (Q1), each store against itself. Gross and ROs are per-month averages of each quarter. The group's own Q1-to-Q3 change is the seasonal baseline: it is the same for every store, so ranking by a store's change is the same as ranking by how far it beat the group. 'Stepped up in' = the month that best splits the store's year into a lower stretch before and a higher stretch after (at least three months before, two after). It is a conversation starter, not proof of cause.
+              <a:t>Takeaway with the store call-outs (off the slide): Mazda went 1.35 to 1.65, stepping up in August. Ask what changed that month.Source: Qlik - Closed Repair Orders. Customer pay, by close date. Same-store, 33 stores (INEOS excluded, opened 2026). GMC Prescott body shop labor types excluded. CP gross = CP labor gross + CP parts gross. Change is Jul-Sep 2026 (Q3) vs Jan-Mar 2026 (Q1), each store against itself. Gross and ROs are per-month averages of each quarter. The group's own Q1-to-Q3 change is the seasonal baseline: it is the same for every store, so ranking by a store's change is the same as ranking by how far it beat the group. 'Stepped up in' = the month that best splits the store's year into a lower stretch before and a higher stretch after (at least three months before, two after). It is a conversation starter, not proof of cause.
 Review note: the month line is the store's own monthly cp hours per ro, so a step up shows as the line moving to a higher level and staying there. Volume measures (gross, ROs) still carry some store-specific seasonality (snowbird markets) the group baseline cannot fully remove; the rate measures are the cleanest read.</a:t>
             </a:r>
             <a:endParaRPr lang="en-US" dirty="0"/>
@@ -15417,7 +15417,7 @@
           <a:p>
             <a:r>
               <a:rPr lang="en-US" dirty="0"/>
-              <a:t>Takeaway (off the slide): VW St George went $128.27 to $141.89, stepping up in June. Ask what changed that month.Source: Qlik - Closed Repair Orders. Customer pay, by close date. Same-store, 33 stores (INEOS excluded, opened 2026). GMC Prescott body shop labor types excluded. CP gross = CP labor gross + CP parts gross. Change is Jul-Sep 2026 (Q3) vs Jan-Mar 2026 (Q1), each store against itself. Gross and ROs are per-month averages of each quarter. The group's own Q1-to-Q3 change is the seasonal baseline: it is the same for every store, so ranking by a store's change is the same as ranking by how far it beat the group. 'Stepped up in' = the month that best splits the store's year into a lower stretch before and a higher stretch after (at least three months before, two after). It is a conversation starter, not proof of cause.
+              <a:t>Takeaway with the store call-outs (off the slide): VW St George went $128.27 to $141.89, stepping up in June. Ask what changed that month.Source: Qlik - Closed Repair Orders. Customer pay, by close date. Same-store, 33 stores (INEOS excluded, opened 2026). GMC Prescott body shop labor types excluded. CP gross = CP labor gross + CP parts gross. Change is Jul-Sep 2026 (Q3) vs Jan-Mar 2026 (Q1), each store against itself. Gross and ROs are per-month averages of each quarter. The group's own Q1-to-Q3 change is the seasonal baseline: it is the same for every store, so ranking by a store's change is the same as ranking by how far it beat the group. 'Stepped up in' = the month that best splits the store's year into a lower stretch before and a higher stretch after (at least three months before, two after). It is a conversation starter, not proof of cause.
 Review note: the month line is the store's own monthly cp elr, so a step up shows as the line moving to a higher level and staying there. Volume measures (gross, ROs) still carry some store-specific seasonality (snowbird markets) the group baseline cannot fully remove; the rate measures are the cleanest read.</a:t>
             </a:r>
             <a:endParaRPr lang="en-US" dirty="0"/>
@@ -15506,7 +15506,7 @@
           <a:p>
             <a:r>
               <a:rPr lang="en-US" dirty="0"/>
-              <a:t>Takeaway (off the slide): VW St George went $224 to $298, stepping up in June. Ask what changed that month.Source: Qlik - Closed Repair Orders. Customer pay, by close date. Same-store, 33 stores (INEOS excluded, opened 2026). GMC Prescott body shop labor types excluded. CP gross = CP labor gross + CP parts gross. Change is Jul-Sep 2026 (Q3) vs Jan-Mar 2026 (Q1), each store against itself. Gross and ROs are per-month averages of each quarter. The group's own Q1-to-Q3 change is the seasonal baseline: it is the same for every store, so ranking by a store's change is the same as ranking by how far it beat the group. 'Stepped up in' = the month that best splits the store's year into a lower stretch before and a higher stretch after (at least three months before, two after). It is a conversation starter, not proof of cause.
+              <a:t>Takeaway with the store call-outs (off the slide): VW St George went $224 to $298, stepping up in June. Ask what changed that month.Source: Qlik - Closed Repair Orders. Customer pay, by close date. Same-store, 33 stores (INEOS excluded, opened 2026). GMC Prescott body shop labor types excluded. CP gross = CP labor gross + CP parts gross. Change is Jul-Sep 2026 (Q3) vs Jan-Mar 2026 (Q1), each store against itself. Gross and ROs are per-month averages of each quarter. The group's own Q1-to-Q3 change is the seasonal baseline: it is the same for every store, so ranking by a store's change is the same as ranking by how far it beat the group. 'Stepped up in' = the month that best splits the store's year into a lower stretch before and a higher stretch after (at least three months before, two after). It is a conversation starter, not proof of cause.
 Review note: the month line is the store's own monthly cp parts $ per ro, so a step up shows as the line moving to a higher level and staying there. Volume measures (gross, ROs) still carry some store-specific seasonality (snowbird markets) the group baseline cannot fully remove; the rate measures are the cleanest read.</a:t>
             </a:r>
             <a:endParaRPr lang="en-US" dirty="0"/>
@@ -15595,7 +15595,7 @@
           <a:p>
             <a:r>
               <a:rPr lang="en-US" dirty="0"/>
-              <a:t>Takeaway (off the slide): Acura went 39.4% to 46.6%, stepping up in April. Ask what changed that month.Source: Qlik - Closed Repair Orders. Customer pay, by close date. Same-store, 33 stores (INEOS excluded, opened 2026). GMC Prescott body shop labor types excluded. CP gross = CP labor gross + CP parts gross. Change is Jul-Sep 2026 (Q3) vs Jan-Mar 2026 (Q1), each store against itself. Gross and ROs are per-month averages of each quarter. The group's own Q1-to-Q3 change is the seasonal baseline: it is the same for every store, so ranking by a store's change is the same as ranking by how far it beat the group. 'Stepped up in' = the month that best splits the store's year into a lower stretch before and a higher stretch after (at least three months before, two after). It is a conversation starter, not proof of cause.
+              <a:t>Takeaway with the store call-outs (off the slide): Acura went 39.4% to 46.6%, stepping up in April. Ask what changed that month.Source: Qlik - Closed Repair Orders. Customer pay, by close date. Same-store, 33 stores (INEOS excluded, opened 2026). GMC Prescott body shop labor types excluded. CP gross = CP labor gross + CP parts gross. Change is Jul-Sep 2026 (Q3) vs Jan-Mar 2026 (Q1), each store against itself. Gross and ROs are per-month averages of each quarter. The group's own Q1-to-Q3 change is the seasonal baseline: it is the same for every store, so ranking by a store's change is the same as ranking by how far it beat the group. 'Stepped up in' = the month that best splits the store's year into a lower stretch before and a higher stretch after (at least three months before, two after). It is a conversation starter, not proof of cause.
 Review note: the month line is the store's own monthly cp parts gp %, so a step up shows as the line moving to a higher level and staying there. Volume measures (gross, ROs) still carry some store-specific seasonality (snowbird markets) the group baseline cannot fully remove; the rate measures are the cleanest read.</a:t>
             </a:r>
             <a:endParaRPr lang="en-US" dirty="0"/>
@@ -15684,7 +15684,7 @@
           <a:p>
             <a:r>
               <a:rPr lang="en-US" dirty="0"/>
-              <a:t>Takeaway (off the slide): Audi Henderson went 21.1% to 31.7%, stepping up in May. Ask what changed that month.Source: Qlik - Closed Repair Orders. Customer pay, by close date. Same-store, 33 stores (INEOS excluded, opened 2026). GMC Prescott body shop labor types excluded. CP gross = CP labor gross + CP parts gross. Change is Jul-Sep 2026 (Q3) vs Jan-Mar 2026 (Q1), each store against itself. Gross and ROs are per-month averages of each quarter. The group's own Q1-to-Q3 change is the seasonal baseline: it is the same for every store, so ranking by a store's change is the same as ranking by how far it beat the group. 'Stepped up in' = the month that best splits the store's year into a lower stretch before and a higher stretch after (at least three months before, two after). It is a conversation starter, not proof of cause. Opcode closing % = ROs with the service ÷ customer-pay ROs on the op-code report basis, same as the Opcode Benchmarks slides.
+              <a:t>Takeaway with the store call-outs (off the slide): Audi Henderson went 21.1% to 31.7%, stepping up in May. Ask what changed that month.Source: Qlik - Closed Repair Orders. Customer pay, by close date. Same-store, 33 stores (INEOS excluded, opened 2026). GMC Prescott body shop labor types excluded. CP gross = CP labor gross + CP parts gross. Change is Jul-Sep 2026 (Q3) vs Jan-Mar 2026 (Q1), each store against itself. Gross and ROs are per-month averages of each quarter. The group's own Q1-to-Q3 change is the seasonal baseline: it is the same for every store, so ranking by a store's change is the same as ranking by how far it beat the group. 'Stepped up in' = the month that best splits the store's year into a lower stretch before and a higher stretch after (at least three months before, two after). It is a conversation starter, not proof of cause. Opcode closing % = ROs with the service ÷ customer-pay ROs on the op-code report basis, same as the Opcode Benchmarks slides.
 Review note: the month line is the store's own monthly alignment %, so a step up shows as the line moving to a higher level and staying there. Volume measures (gross, ROs) still carry some store-specific seasonality (snowbird markets) the group baseline cannot fully remove; the rate measures are the cleanest read.</a:t>
             </a:r>
             <a:endParaRPr lang="en-US" dirty="0"/>
@@ -15773,7 +15773,7 @@
           <a:p>
             <a:r>
               <a:rPr lang="en-US" dirty="0"/>
-              <a:t>Takeaway (off the slide): Mazda went 10.1% to 19.3%, stepping up in August. Ask what changed that month.Source: Qlik - Closed Repair Orders. Customer pay, by close date. Same-store, 33 stores (INEOS excluded, opened 2026). GMC Prescott body shop labor types excluded. CP gross = CP labor gross + CP parts gross. Change is Jul-Sep 2026 (Q3) vs Jan-Mar 2026 (Q1), each store against itself. Gross and ROs are per-month averages of each quarter. The group's own Q1-to-Q3 change is the seasonal baseline: it is the same for every store, so ranking by a store's change is the same as ranking by how far it beat the group. 'Stepped up in' = the month that best splits the store's year into a lower stretch before and a higher stretch after (at least three months before, two after). It is a conversation starter, not proof of cause. Opcode closing % = ROs with the service ÷ customer-pay ROs on the op-code report basis, same as the Opcode Benchmarks slides.
+              <a:t>Takeaway with the store call-outs (off the slide): Mazda went 10.1% to 19.3%, stepping up in August. Ask what changed that month.Source: Qlik - Closed Repair Orders. Customer pay, by close date. Same-store, 33 stores (INEOS excluded, opened 2026). GMC Prescott body shop labor types excluded. CP gross = CP labor gross + CP parts gross. Change is Jul-Sep 2026 (Q3) vs Jan-Mar 2026 (Q1), each store against itself. Gross and ROs are per-month averages of each quarter. The group's own Q1-to-Q3 change is the seasonal baseline: it is the same for every store, so ranking by a store's change is the same as ranking by how far it beat the group. 'Stepped up in' = the month that best splits the store's year into a lower stretch before and a higher stretch after (at least three months before, two after). It is a conversation starter, not proof of cause. Opcode closing % = ROs with the service ÷ customer-pay ROs on the op-code report basis, same as the Opcode Benchmarks slides.
 Review note: the month line is the store's own monthly balance %, so a step up shows as the line moving to a higher level and staying there. Volume measures (gross, ROs) still carry some store-specific seasonality (snowbird markets) the group baseline cannot fully remove; the rate measures are the cleanest read.</a:t>
             </a:r>
             <a:endParaRPr lang="en-US" dirty="0"/>
@@ -15862,7 +15862,7 @@
           <a:p>
             <a:r>
               <a:rPr lang="en-US" dirty="0"/>
-              <a:t>Takeaway (off the slide): Mazda went 5.2% to 14.1%, stepping up in August. Ask what changed that month.Source: Qlik - Closed Repair Orders. Customer pay, by close date. Same-store, 33 stores (INEOS excluded, opened 2026). GMC Prescott body shop labor types excluded. CP gross = CP labor gross + CP parts gross. Change is Jul-Sep 2026 (Q3) vs Jan-Mar 2026 (Q1), each store against itself. Gross and ROs are per-month averages of each quarter. The group's own Q1-to-Q3 change is the seasonal baseline: it is the same for every store, so ranking by a store's change is the same as ranking by how far it beat the group. 'Stepped up in' = the month that best splits the store's year into a lower stretch before and a higher stretch after (at least three months before, two after). It is a conversation starter, not proof of cause. Opcode closing % = ROs with the service ÷ customer-pay ROs on the op-code report basis, same as the Opcode Benchmarks slides.
+              <a:t>Takeaway with the store call-outs (off the slide): Mazda went 5.2% to 14.1%, stepping up in August. Ask what changed that month.Source: Qlik - Closed Repair Orders. Customer pay, by close date. Same-store, 33 stores (INEOS excluded, opened 2026). GMC Prescott body shop labor types excluded. CP gross = CP labor gross + CP parts gross. Change is Jul-Sep 2026 (Q3) vs Jan-Mar 2026 (Q1), each store against itself. Gross and ROs are per-month averages of each quarter. The group's own Q1-to-Q3 change is the seasonal baseline: it is the same for every store, so ranking by a store's change is the same as ranking by how far it beat the group. 'Stepped up in' = the month that best splits the store's year into a lower stretch before and a higher stretch after (at least three months before, two after). It is a conversation starter, not proof of cause. Opcode closing % = ROs with the service ÷ customer-pay ROs on the op-code report basis, same as the Opcode Benchmarks slides.
 Review note: the month line is the store's own monthly brake fluid %, so a step up shows as the line moving to a higher level and staying there. Volume measures (gross, ROs) still carry some store-specific seasonality (snowbird markets) the group baseline cannot fully remove; the rate measures are the cleanest read.</a:t>
             </a:r>
             <a:endParaRPr lang="en-US" dirty="0"/>
